--- a/COMP301 Project Final Submission/Final Report and Documentation/Presentation/The_Skeptics_Final_Presentation_Final_v2.pptx
+++ b/COMP301 Project Final Submission/Final Report and Documentation/Presentation/The_Skeptics_Final_Presentation_Final_v2.pptx
@@ -5,7 +5,7 @@
     <p:sldMasterId id="2147483648" r:id="rId1"/>
   </p:sldMasterIdLst>
   <p:notesMasterIdLst>
-    <p:notesMasterId r:id="rId30"/>
+    <p:notesMasterId r:id="rId32"/>
   </p:notesMasterIdLst>
   <p:sldIdLst>
     <p:sldId id="256" r:id="rId2"/>
@@ -31,12 +31,13 @@
     <p:sldId id="284" r:id="rId22"/>
     <p:sldId id="276" r:id="rId23"/>
     <p:sldId id="277" r:id="rId24"/>
-    <p:sldId id="286" r:id="rId35"/>
-    <p:sldId id="278" r:id="rId25"/>
-    <p:sldId id="279" r:id="rId26"/>
-    <p:sldId id="280" r:id="rId27"/>
-    <p:sldId id="281" r:id="rId28"/>
-    <p:sldId id="282" r:id="rId29"/>
+    <p:sldId id="286" r:id="rId25"/>
+    <p:sldId id="287" r:id="rId26"/>
+    <p:sldId id="278" r:id="rId27"/>
+    <p:sldId id="279" r:id="rId28"/>
+    <p:sldId id="280" r:id="rId29"/>
+    <p:sldId id="281" r:id="rId30"/>
+    <p:sldId id="282" r:id="rId31"/>
   </p:sldIdLst>
   <p:sldSz cx="12192000" cy="6858000"/>
   <p:notesSz cx="6858000" cy="12192000"/>
@@ -6956,25 +6957,25 @@
           <a:p>
             <a:r>
               <a:rPr lang="en-US" dirty="0"/>
-              <a:t>To conclude: yes, a Confident Agent built this way stops most API hallucinations from reaching the user, from over half of tasks to about 2 percent.</a:t>
+              <a:t>So, you might be thinking: what about application? How can we apply this in the real world?</a:t>
             </a:r>
           </a:p>
           <a:p>
             <a:r>
               <a:rPr lang="en-US" dirty="0"/>
-              <a:t>We also found why the baseline fails. Most of its hallucinations, 83 percent, were retired or invented API versions: the model repeats the hosts and versions that dominate its training data, and makes up version numbers it has never seen. A model's training is a snapshot, and nothing in its weights records that an API has since moved, so the fix has to come from outside the model. Current coding agents do add outside help, for example by reading up-to-date documentation, but we did not test a baseline with retrieval, so we cannot say how much of the gap that closes.</a:t>
+              <a:t>Now imagine a company with a large codebase and its own internal APIs, and developers using an AI coding assistant. Today, when that assistant writes a call to one of those APIs, the developer has to either trust it or check it by hand. Put a checker like ours between the assistant and the developer. It reads the company's own API specifications, frozen and versioned, and checks every claim in the code against them. The developer then sees one of three things: verified code, code with a warning, or code held back with the reason.</a:t>
             </a:r>
           </a:p>
           <a:p>
             <a:r>
               <a:rPr lang="en-US" dirty="0"/>
-              <a:t>Our agent is safe rather than always useful, it costs time, and passing verification is not the same as doing the task. A Confident Agent is not one that is always correct; it is one that knows when it should not be trusted. Our agent earns that trust through explicit rules in its architecture, not through the model's own judgement.</a:t>
+              <a:t>This fits for three reasons. The task is specialised: one codebase with known contracts, not the whole internet. It stays current, because when a contract changes you update the checker's evidence, not the model. And it is cheap to run: about one cent of local electricity per prompt in our tests, though the real price is time, about six times longer.</a:t>
             </a:r>
           </a:p>
           <a:p>
             <a:r>
               <a:rPr lang="en-US" dirty="0"/>
-              <a:t>Thank you for watching. (Jawad End)</a:t>
+              <a:t>To be clear, this is a sketch of an application, not something we tested. Our evidence covers one model and six public APIs.</a:t>
             </a:r>
           </a:p>
         </p:txBody>
@@ -6996,7 +6997,7 @@
           <a:p>
             <a:fld id="{F7021451-1387-4CA6-816F-3879F97B5CBC}" type="slidenum">
               <a:rPr lang="en-US"/>
-              <a:t>25</a:t>
+              <a:t>24</a:t>
             </a:fld>
             <a:endParaRPr lang="en-US"/>
           </a:p>
@@ -7005,7 +7006,7 @@
     </p:spTree>
     <p:extLst>
       <p:ext uri="{BB962C8B-B14F-4D97-AF65-F5344CB8AC3E}">
-        <p14:creationId xmlns:p14="http://schemas.microsoft.com/office/powerpoint/2010/main" val="1024086991"/>
+        <p14:creationId xmlns:p14="http://schemas.microsoft.com/office/powerpoint/2010/main" val="1024086999"/>
       </p:ext>
     </p:extLst>
   </p:cSld>
@@ -7059,7 +7060,28 @@
           <a:bodyPr/>
           <a:lstStyle/>
           <a:p>
-            <a:endParaRPr lang="en-US" dirty="0"/>
+            <a:r>
+              <a:rPr lang="en-US" dirty="0"/>
+              <a:t>So, you might be thinking: what about application? How can we apply this in the real world?</a:t>
+            </a:r>
+          </a:p>
+          <a:p>
+            <a:r>
+              <a:rPr lang="en-US" dirty="0"/>
+              <a:t>Now imagine a company with a large codebase and its own internal APIs, and developers using an AI coding assistant. Today, when that assistant writes a call to one of those APIs, the developer has to either trust it or check it by hand. Put a checker like ours between the assistant and the developer. It reads the company's own API specifications, frozen and versioned, and checks every claim in the code against them. The developer then sees one of three things: verified code, code with a warning, or code held back with the reason.</a:t>
+            </a:r>
+          </a:p>
+          <a:p>
+            <a:r>
+              <a:rPr lang="en-US" dirty="0"/>
+              <a:t>This fits for three reasons. The task is specialised: one codebase with known contracts, not the whole internet. It stays current, because when a contract changes you update the checker's evidence, not the model. And it is cheap to run: about one cent of local electricity per prompt in our tests, though the real price is time, about six times longer.</a:t>
+            </a:r>
+          </a:p>
+          <a:p>
+            <a:r>
+              <a:rPr lang="en-US" dirty="0"/>
+              <a:t>To be clear, this is a sketch of an application, not something we tested. Our evidence covers one model and six public APIs.</a:t>
+            </a:r>
           </a:p>
         </p:txBody>
       </p:sp>
@@ -7089,7 +7111,7 @@
     </p:spTree>
     <p:extLst>
       <p:ext uri="{BB962C8B-B14F-4D97-AF65-F5344CB8AC3E}">
-        <p14:creationId xmlns:p14="http://schemas.microsoft.com/office/powerpoint/2010/main" val="1024086991"/>
+        <p14:creationId xmlns:p14="http://schemas.microsoft.com/office/powerpoint/2010/main" val="1024086999"/>
       </p:ext>
     </p:extLst>
   </p:cSld>
@@ -7143,7 +7165,28 @@
           <a:bodyPr/>
           <a:lstStyle/>
           <a:p>
-            <a:endParaRPr lang="en-US" dirty="0"/>
+            <a:r>
+              <a:rPr lang="en-US" dirty="0"/>
+              <a:t>To conclude: yes, a Confident Agent built this way stops most API hallucinations from reaching the user, from over half of tasks to about 2 percent.</a:t>
+            </a:r>
+          </a:p>
+          <a:p>
+            <a:r>
+              <a:rPr lang="en-US" dirty="0"/>
+              <a:t>We also found why the baseline fails. Most of its hallucinations, 83 percent, were retired or invented API versions: the model repeats the hosts and versions that dominate its training data, and makes up version numbers it has never seen. A model's training is a snapshot, and nothing in its weights records that an API has since moved, so the fix has to come from outside the model. Current coding agents do add outside help, for example by reading up-to-date documentation, but we did not test a baseline with retrieval, so we cannot say how much of the gap that closes.</a:t>
+            </a:r>
+          </a:p>
+          <a:p>
+            <a:r>
+              <a:rPr lang="en-US" dirty="0"/>
+              <a:t>Our agent is safe rather than always useful, it costs time, and passing verification is not the same as doing the task. A Confident Agent is not one that is always correct; it is one that knows when it should not be trusted. Our agent earns that trust through explicit rules in its architecture, not through the model's own judgement.</a:t>
+            </a:r>
+          </a:p>
+          <a:p>
+            <a:r>
+              <a:rPr lang="en-US" dirty="0"/>
+              <a:t>Thank you for watching. (Jawad End)</a:t>
+            </a:r>
           </a:p>
         </p:txBody>
       </p:sp>
@@ -7395,28 +7438,7 @@
           <a:bodyPr/>
           <a:lstStyle/>
           <a:p>
-            <a:r>
-              <a:rPr lang="en-US" dirty="0"/>
-              <a:t>So, you might be thinking: what about application? How can we apply this in the real world?</a:t>
-            </a:r>
-          </a:p>
-          <a:p>
-            <a:r>
-              <a:rPr lang="en-US" dirty="0"/>
-              <a:t>Now imagine a company with a large codebase and its own internal APIs, and developers using an AI coding assistant. Today, when that assistant writes a call to one of those APIs, the developer has to either trust it or check it by hand. Put a checker like ours between the assistant and the developer. It reads the company's own API specifications, frozen and versioned, and checks every claim in the code against them. The developer then sees one of three things: verified code, code with a warning, or code held back with the reason.</a:t>
-            </a:r>
-          </a:p>
-          <a:p>
-            <a:r>
-              <a:rPr lang="en-US" dirty="0"/>
-              <a:t>This fits for three reasons. The task is specialised: one codebase with known contracts, not the whole internet. It stays current, because when a contract changes you update the checker's evidence, not the model. And it is cheap to run: about one cent of local electricity per prompt in our tests, though the real price is time, about six times longer.</a:t>
-            </a:r>
-          </a:p>
-          <a:p>
-            <a:r>
-              <a:rPr lang="en-US" dirty="0"/>
-              <a:t>To be clear, this is a sketch of an application, not something we tested. Our evidence covers one model and six public APIs.</a:t>
-            </a:r>
+            <a:endParaRPr lang="en-US" dirty="0"/>
           </a:p>
         </p:txBody>
       </p:sp>
@@ -7437,7 +7459,7 @@
           <a:p>
             <a:fld id="{F7021451-1387-4CA6-816F-3879F97B5CBC}" type="slidenum">
               <a:rPr lang="en-US"/>
-              <a:t>24</a:t>
+              <a:t>29</a:t>
             </a:fld>
             <a:endParaRPr lang="en-US"/>
           </a:p>
@@ -7446,7 +7468,7 @@
     </p:spTree>
     <p:extLst>
       <p:ext uri="{BB962C8B-B14F-4D97-AF65-F5344CB8AC3E}">
-        <p14:creationId xmlns:p14="http://schemas.microsoft.com/office/powerpoint/2010/main" val="1024086999"/>
+        <p14:creationId xmlns:p14="http://schemas.microsoft.com/office/powerpoint/2010/main" val="1024086991"/>
       </p:ext>
     </p:extLst>
   </p:cSld>
@@ -7525,6 +7547,90 @@
             <a:fld id="{F7021451-1387-4CA6-816F-3879F97B5CBC}" type="slidenum">
               <a:rPr lang="en-US"/>
               <a:t>3</a:t>
+            </a:fld>
+            <a:endParaRPr lang="en-US"/>
+          </a:p>
+        </p:txBody>
+      </p:sp>
+    </p:spTree>
+    <p:extLst>
+      <p:ext uri="{BB962C8B-B14F-4D97-AF65-F5344CB8AC3E}">
+        <p14:creationId xmlns:p14="http://schemas.microsoft.com/office/powerpoint/2010/main" val="1024086991"/>
+      </p:ext>
+    </p:extLst>
+  </p:cSld>
+  <p:clrMapOvr>
+    <a:masterClrMapping/>
+  </p:clrMapOvr>
+</p:notes>
+</file>
+
+<file path=ppt/notesSlides/notesSlide30.xml><?xml version="1.0" encoding="utf-8"?>
+<p:notes xmlns:a="http://schemas.openxmlformats.org/drawingml/2006/main" xmlns:r="http://schemas.openxmlformats.org/officeDocument/2006/relationships" xmlns:p="http://schemas.openxmlformats.org/presentationml/2006/main">
+  <p:cSld>
+    <p:spTree>
+      <p:nvGrpSpPr>
+        <p:cNvPr id="1" name=""/>
+        <p:cNvGrpSpPr/>
+        <p:nvPr/>
+      </p:nvGrpSpPr>
+      <p:grpSpPr>
+        <a:xfrm>
+          <a:off x="0" y="0"/>
+          <a:ext cx="0" cy="0"/>
+          <a:chOff x="0" y="0"/>
+          <a:chExt cx="0" cy="0"/>
+        </a:xfrm>
+      </p:grpSpPr>
+      <p:sp>
+        <p:nvSpPr>
+          <p:cNvPr id="2" name="Slide Image Placeholder 1"/>
+          <p:cNvSpPr>
+            <a:spLocks noGrp="1" noRot="1" noChangeAspect="1"/>
+          </p:cNvSpPr>
+          <p:nvPr>
+            <p:ph type="sldImg"/>
+          </p:nvPr>
+        </p:nvSpPr>
+        <p:spPr/>
+      </p:sp>
+      <p:sp>
+        <p:nvSpPr>
+          <p:cNvPr id="3" name="Notes Placeholder 2"/>
+          <p:cNvSpPr>
+            <a:spLocks noGrp="1"/>
+          </p:cNvSpPr>
+          <p:nvPr>
+            <p:ph type="body" idx="1"/>
+          </p:nvPr>
+        </p:nvSpPr>
+        <p:spPr/>
+        <p:txBody>
+          <a:bodyPr/>
+          <a:lstStyle/>
+          <a:p>
+            <a:endParaRPr lang="en-US" dirty="0"/>
+          </a:p>
+        </p:txBody>
+      </p:sp>
+      <p:sp>
+        <p:nvSpPr>
+          <p:cNvPr id="4" name="Slide Number Placeholder 3"/>
+          <p:cNvSpPr>
+            <a:spLocks noGrp="1"/>
+          </p:cNvSpPr>
+          <p:nvPr>
+            <p:ph type="sldNum" sz="quarter" idx="10"/>
+          </p:nvPr>
+        </p:nvSpPr>
+        <p:spPr/>
+        <p:txBody>
+          <a:bodyPr/>
+          <a:lstStyle/>
+          <a:p>
+            <a:fld id="{F7021451-1387-4CA6-816F-3879F97B5CBC}" type="slidenum">
+              <a:rPr lang="en-US"/>
+              <a:t>30</a:t>
             </a:fld>
             <a:endParaRPr lang="en-US"/>
           </a:p>
@@ -9044,11 +9150,11 @@
   <p:clrMapOvr>
     <a:masterClrMapping/>
   </p:clrMapOvr>
-  <mc:AlternateContent xmlns:mc="http://schemas.openxmlformats.org/markup-compatibility/2006">
-    <mc:Choice xmlns:p14="http://schemas.microsoft.com/office/powerpoint/2010/main" Requires="p14">
+  <mc:AlternateContent xmlns:mc="http://schemas.openxmlformats.org/markup-compatibility/2006" xmlns:p14="http://schemas.microsoft.com/office/powerpoint/2010/main">
+    <mc:Choice Requires="p14">
       <p:transition spd="slow" p14:dur="2000" advTm="2859"/>
     </mc:Choice>
-    <mc:Fallback>
+    <mc:Fallback xmlns="">
       <p:transition spd="slow" advTm="2859"/>
     </mc:Fallback>
   </mc:AlternateContent>
@@ -22627,6 +22733,2533 @@
 
 <file path=ppt/slides/slide24.xml><?xml version="1.0" encoding="utf-8"?>
 <p:sld xmlns:a="http://schemas.openxmlformats.org/drawingml/2006/main" xmlns:r="http://schemas.openxmlformats.org/officeDocument/2006/relationships" xmlns:p="http://schemas.openxmlformats.org/presentationml/2006/main">
+  <p:cSld name="Slide 22">
+    <p:spTree>
+      <p:nvGrpSpPr>
+        <p:cNvPr id="1" name=""/>
+        <p:cNvGrpSpPr/>
+        <p:nvPr/>
+      </p:nvGrpSpPr>
+      <p:grpSpPr>
+        <a:xfrm>
+          <a:off x="0" y="0"/>
+          <a:ext cx="0" cy="0"/>
+          <a:chOff x="0" y="0"/>
+          <a:chExt cx="0" cy="0"/>
+        </a:xfrm>
+      </p:grpSpPr>
+      <p:sp>
+        <p:nvSpPr>
+          <p:cNvPr id="2" name="Text 0"/>
+          <p:cNvSpPr>
+            <a:spLocks noGrp="1"/>
+          </p:cNvSpPr>
+          <p:nvPr>
+            <p:ph type="title" idx="100" hasCustomPrompt="1"/>
+          </p:nvPr>
+        </p:nvSpPr>
+        <p:spPr>
+          <a:xfrm>
+            <a:off x="548640" y="365760"/>
+            <a:ext cx="11064240" cy="868680"/>
+          </a:xfrm>
+          <a:prstGeom prst="rect">
+            <a:avLst/>
+          </a:prstGeom>
+          <a:noFill/>
+          <a:ln/>
+        </p:spPr>
+        <p:txBody>
+          <a:bodyPr wrap="square" lIns="0" tIns="0" rIns="0" bIns="0" rtlCol="0" anchor="ctr"/>
+          <a:lstStyle/>
+          <a:p>
+            <a:pPr marL="0" indent="0" algn="l">
+              <a:buNone/>
+            </a:pPr>
+            <a:r>
+              <a:rPr lang="en-US" sz="3400" b="1" dirty="0">
+                <a:solidFill>
+                  <a:srgbClr val="F2F5FA"/>
+                </a:solidFill>
+                <a:latin typeface="Cambria" pitchFamily="34" charset="0"/>
+                <a:ea typeface="Cambria" pitchFamily="34" charset="-122"/>
+                <a:cs typeface="Cambria" pitchFamily="34" charset="-120"/>
+              </a:rPr>
+              <a:t>Applying it in the real world</a:t>
+            </a:r>
+            <a:endParaRPr lang="en-US" sz="3400" dirty="0"/>
+          </a:p>
+        </p:txBody>
+      </p:sp>
+      <p:sp>
+        <p:nvSpPr>
+          <p:cNvPr id="11" name="Subtitle"/>
+          <p:cNvSpPr txBox="1"/>
+          <p:nvPr/>
+        </p:nvSpPr>
+        <p:spPr>
+          <a:xfrm>
+            <a:off x="548640" y="1234440"/>
+            <a:ext cx="11064240" cy="320040"/>
+          </a:xfrm>
+          <a:prstGeom prst="rect">
+            <a:avLst/>
+          </a:prstGeom>
+          <a:noFill/>
+          <a:ln/>
+        </p:spPr>
+        <p:txBody>
+          <a:bodyPr wrap="square" lIns="0" tIns="0" rIns="0" bIns="0" rtlCol="0" anchor="t"/>
+          <a:lstStyle/>
+          <a:p>
+            <a:pPr marL="0" indent="0" algn="l">
+              <a:spcAft>
+                <a:spcPts val="0"/>
+              </a:spcAft>
+              <a:buNone/>
+            </a:pPr>
+            <a:r>
+              <a:rPr lang="en-US" sz="1600" kern="0" dirty="0">
+                <a:solidFill>
+                  <a:srgbClr val="9FB2CC"/>
+                </a:solidFill>
+                <a:latin typeface="Calibri" pitchFamily="34" charset="0"/>
+                <a:ea typeface="Calibri" pitchFamily="34" charset="-122"/>
+                <a:cs typeface="Calibri" pitchFamily="34" charset="-120"/>
+              </a:rPr>
+              <a:t>Now imagine a company with a large codebase and its own internal APIs</a:t>
+            </a:r>
+          </a:p>
+        </p:txBody>
+      </p:sp>
+      <p:sp>
+        <p:nvSpPr>
+          <p:cNvPr id="12" name="Flow card 1"/>
+          <p:cNvSpPr/>
+          <p:nvPr/>
+        </p:nvSpPr>
+        <p:spPr>
+          <a:xfrm>
+            <a:off x="548640" y="1737360"/>
+            <a:ext cx="3383280" cy="2103120"/>
+          </a:xfrm>
+          <a:prstGeom prst="roundRect">
+            <a:avLst>
+              <a:gd name="adj" fmla="val 4500"/>
+            </a:avLst>
+          </a:prstGeom>
+          <a:solidFill>
+            <a:srgbClr val="16294A"/>
+          </a:solidFill>
+          <a:ln w="12700">
+            <a:solidFill>
+              <a:srgbClr val="2B4470"/>
+            </a:solidFill>
+            <a:prstDash val="solid"/>
+          </a:ln>
+          <a:effectLst>
+            <a:outerShdw blurRad="152400" dist="38100" dir="5400000" algn="bl" rotWithShape="0">
+              <a:srgbClr val="000000">
+                <a:alpha val="35000"/>
+              </a:srgbClr>
+            </a:outerShdw>
+          </a:effectLst>
+        </p:spPr>
+        <p:txBody>
+          <a:bodyPr/>
+          <a:lstStyle/>
+          <a:p>
+            <a:endParaRPr lang="en-GB"/>
+          </a:p>
+        </p:txBody>
+      </p:sp>
+      <p:sp>
+        <p:nvSpPr>
+          <p:cNvPr id="13" name="Flow label 1"/>
+          <p:cNvSpPr txBox="1"/>
+          <p:nvPr/>
+        </p:nvSpPr>
+        <p:spPr>
+          <a:xfrm>
+            <a:off x="777240" y="1920240"/>
+            <a:ext cx="2926080" cy="274320"/>
+          </a:xfrm>
+          <a:prstGeom prst="rect">
+            <a:avLst/>
+          </a:prstGeom>
+          <a:noFill/>
+          <a:ln/>
+        </p:spPr>
+        <p:txBody>
+          <a:bodyPr wrap="square" lIns="0" tIns="0" rIns="0" bIns="0" rtlCol="0" anchor="t"/>
+          <a:lstStyle/>
+          <a:p>
+            <a:pPr marL="0" indent="0" algn="l">
+              <a:spcAft>
+                <a:spcPts val="0"/>
+              </a:spcAft>
+              <a:buNone/>
+            </a:pPr>
+            <a:r>
+              <a:rPr lang="en-US" sz="1200" b="1" kern="0" spc="150" dirty="0">
+                <a:solidFill>
+                  <a:srgbClr val="8FC1FF"/>
+                </a:solidFill>
+                <a:latin typeface="Calibri" pitchFamily="34" charset="0"/>
+                <a:ea typeface="Calibri" pitchFamily="34" charset="-122"/>
+                <a:cs typeface="Calibri" pitchFamily="34" charset="-120"/>
+              </a:rPr>
+              <a:t>1   THE ASSISTANT WRITES</a:t>
+            </a:r>
+          </a:p>
+        </p:txBody>
+      </p:sp>
+      <p:sp>
+        <p:nvSpPr>
+          <p:cNvPr id="14" name="Flow card 2"/>
+          <p:cNvSpPr/>
+          <p:nvPr/>
+        </p:nvSpPr>
+        <p:spPr>
+          <a:xfrm>
+            <a:off x="4389120" y="1737360"/>
+            <a:ext cx="3383280" cy="2103120"/>
+          </a:xfrm>
+          <a:prstGeom prst="roundRect">
+            <a:avLst>
+              <a:gd name="adj" fmla="val 4500"/>
+            </a:avLst>
+          </a:prstGeom>
+          <a:solidFill>
+            <a:srgbClr val="16294A"/>
+          </a:solidFill>
+          <a:ln w="19050">
+            <a:solidFill>
+              <a:srgbClr val="8FC1FF"/>
+            </a:solidFill>
+            <a:prstDash val="solid"/>
+          </a:ln>
+          <a:effectLst>
+            <a:outerShdw blurRad="152400" dist="38100" dir="5400000" algn="bl" rotWithShape="0">
+              <a:srgbClr val="000000">
+                <a:alpha val="35000"/>
+              </a:srgbClr>
+            </a:outerShdw>
+          </a:effectLst>
+        </p:spPr>
+        <p:txBody>
+          <a:bodyPr/>
+          <a:lstStyle/>
+          <a:p>
+            <a:endParaRPr lang="en-GB"/>
+          </a:p>
+        </p:txBody>
+      </p:sp>
+      <p:sp>
+        <p:nvSpPr>
+          <p:cNvPr id="15" name="Flow label 2"/>
+          <p:cNvSpPr txBox="1"/>
+          <p:nvPr/>
+        </p:nvSpPr>
+        <p:spPr>
+          <a:xfrm>
+            <a:off x="4617720" y="1920240"/>
+            <a:ext cx="2926080" cy="274320"/>
+          </a:xfrm>
+          <a:prstGeom prst="rect">
+            <a:avLst/>
+          </a:prstGeom>
+          <a:noFill/>
+          <a:ln/>
+        </p:spPr>
+        <p:txBody>
+          <a:bodyPr wrap="square" lIns="0" tIns="0" rIns="0" bIns="0" rtlCol="0" anchor="t"/>
+          <a:lstStyle/>
+          <a:p>
+            <a:pPr marL="0" indent="0" algn="l">
+              <a:spcAft>
+                <a:spcPts val="0"/>
+              </a:spcAft>
+              <a:buNone/>
+            </a:pPr>
+            <a:r>
+              <a:rPr lang="en-US" sz="1200" b="1" kern="0" spc="150" dirty="0">
+                <a:solidFill>
+                  <a:srgbClr val="8FC1FF"/>
+                </a:solidFill>
+                <a:latin typeface="Calibri" pitchFamily="34" charset="0"/>
+                <a:ea typeface="Calibri" pitchFamily="34" charset="-122"/>
+                <a:cs typeface="Calibri" pitchFamily="34" charset="-120"/>
+              </a:rPr>
+              <a:t>2   THE CHECKER READS</a:t>
+            </a:r>
+          </a:p>
+        </p:txBody>
+      </p:sp>
+      <p:sp>
+        <p:nvSpPr>
+          <p:cNvPr id="16" name="Flow card 3"/>
+          <p:cNvSpPr/>
+          <p:nvPr/>
+        </p:nvSpPr>
+        <p:spPr>
+          <a:xfrm>
+            <a:off x="8229600" y="1737360"/>
+            <a:ext cx="3383280" cy="2103120"/>
+          </a:xfrm>
+          <a:prstGeom prst="roundRect">
+            <a:avLst>
+              <a:gd name="adj" fmla="val 4500"/>
+            </a:avLst>
+          </a:prstGeom>
+          <a:solidFill>
+            <a:srgbClr val="16294A"/>
+          </a:solidFill>
+          <a:ln w="12700">
+            <a:solidFill>
+              <a:srgbClr val="2B4470"/>
+            </a:solidFill>
+            <a:prstDash val="solid"/>
+          </a:ln>
+          <a:effectLst>
+            <a:outerShdw blurRad="152400" dist="38100" dir="5400000" algn="bl" rotWithShape="0">
+              <a:srgbClr val="000000">
+                <a:alpha val="35000"/>
+              </a:srgbClr>
+            </a:outerShdw>
+          </a:effectLst>
+        </p:spPr>
+        <p:txBody>
+          <a:bodyPr/>
+          <a:lstStyle/>
+          <a:p>
+            <a:endParaRPr lang="en-GB"/>
+          </a:p>
+        </p:txBody>
+      </p:sp>
+      <p:sp>
+        <p:nvSpPr>
+          <p:cNvPr id="17" name="Flow label 3"/>
+          <p:cNvSpPr txBox="1"/>
+          <p:nvPr/>
+        </p:nvSpPr>
+        <p:spPr>
+          <a:xfrm>
+            <a:off x="8458200" y="1920240"/>
+            <a:ext cx="2926080" cy="274320"/>
+          </a:xfrm>
+          <a:prstGeom prst="rect">
+            <a:avLst/>
+          </a:prstGeom>
+          <a:noFill/>
+          <a:ln/>
+        </p:spPr>
+        <p:txBody>
+          <a:bodyPr wrap="square" lIns="0" tIns="0" rIns="0" bIns="0" rtlCol="0" anchor="t"/>
+          <a:lstStyle/>
+          <a:p>
+            <a:pPr marL="0" indent="0" algn="l">
+              <a:spcAft>
+                <a:spcPts val="0"/>
+              </a:spcAft>
+              <a:buNone/>
+            </a:pPr>
+            <a:r>
+              <a:rPr lang="en-US" sz="1200" b="1" kern="0" spc="150" dirty="0">
+                <a:solidFill>
+                  <a:srgbClr val="8FC1FF"/>
+                </a:solidFill>
+                <a:latin typeface="Calibri" pitchFamily="34" charset="0"/>
+                <a:ea typeface="Calibri" pitchFamily="34" charset="-122"/>
+                <a:cs typeface="Calibri" pitchFamily="34" charset="-120"/>
+              </a:rPr>
+              <a:t>3   THE DEVELOPER SEES</a:t>
+            </a:r>
+          </a:p>
+        </p:txBody>
+      </p:sp>
+      <p:sp>
+        <p:nvSpPr>
+          <p:cNvPr id="18" name="Flow text 1"/>
+          <p:cNvSpPr txBox="1"/>
+          <p:nvPr/>
+        </p:nvSpPr>
+        <p:spPr>
+          <a:xfrm>
+            <a:off x="777240" y="2377440"/>
+            <a:ext cx="2926080" cy="1371600"/>
+          </a:xfrm>
+          <a:prstGeom prst="rect">
+            <a:avLst/>
+          </a:prstGeom>
+          <a:noFill/>
+          <a:ln/>
+        </p:spPr>
+        <p:txBody>
+          <a:bodyPr wrap="square" lIns="0" tIns="0" rIns="0" bIns="0" rtlCol="0" anchor="t"/>
+          <a:lstStyle/>
+          <a:p>
+            <a:pPr marL="0" indent="0" algn="l">
+              <a:spcAft>
+                <a:spcPts val="0"/>
+              </a:spcAft>
+              <a:buNone/>
+            </a:pPr>
+            <a:r>
+              <a:rPr lang="en-US" sz="1800" kern="0" dirty="0">
+                <a:solidFill>
+                  <a:srgbClr val="F2F5FA"/>
+                </a:solidFill>
+                <a:latin typeface="Calibri" pitchFamily="34" charset="0"/>
+                <a:ea typeface="Calibri" pitchFamily="34" charset="-122"/>
+                <a:cs typeface="Calibri" pitchFamily="34" charset="-120"/>
+              </a:rPr>
+              <a:t>An AI coding assistant drafts a call to one of the company’s own APIs.</a:t>
+            </a:r>
+          </a:p>
+        </p:txBody>
+      </p:sp>
+      <p:sp>
+        <p:nvSpPr>
+          <p:cNvPr id="19" name="Flow text 2"/>
+          <p:cNvSpPr txBox="1"/>
+          <p:nvPr/>
+        </p:nvSpPr>
+        <p:spPr>
+          <a:xfrm>
+            <a:off x="4617720" y="2377440"/>
+            <a:ext cx="2926080" cy="1371600"/>
+          </a:xfrm>
+          <a:prstGeom prst="rect">
+            <a:avLst/>
+          </a:prstGeom>
+          <a:noFill/>
+          <a:ln/>
+        </p:spPr>
+        <p:txBody>
+          <a:bodyPr wrap="square" lIns="0" tIns="0" rIns="0" bIns="0" rtlCol="0" anchor="t"/>
+          <a:lstStyle/>
+          <a:p>
+            <a:pPr marL="0" indent="0" algn="l">
+              <a:spcAft>
+                <a:spcPts val="0"/>
+              </a:spcAft>
+              <a:buNone/>
+            </a:pPr>
+            <a:r>
+              <a:rPr lang="en-US" sz="1800" kern="0" dirty="0">
+                <a:solidFill>
+                  <a:srgbClr val="F2F5FA"/>
+                </a:solidFill>
+                <a:latin typeface="Calibri" pitchFamily="34" charset="0"/>
+                <a:ea typeface="Calibri" pitchFamily="34" charset="-122"/>
+                <a:cs typeface="Calibri" pitchFamily="34" charset="-120"/>
+              </a:rPr>
+              <a:t>Every claim in the code is checked against that API’s specification, frozen and versioned.</a:t>
+            </a:r>
+          </a:p>
+        </p:txBody>
+      </p:sp>
+      <p:sp>
+        <p:nvSpPr>
+          <p:cNvPr id="20" name="Arrow 1"/>
+          <p:cNvSpPr/>
+          <p:nvPr/>
+        </p:nvSpPr>
+        <p:spPr>
+          <a:xfrm>
+            <a:off x="4023360" y="2606040"/>
+            <a:ext cx="274320" cy="365760"/>
+          </a:xfrm>
+          <a:prstGeom prst="rightArrow">
+            <a:avLst/>
+          </a:prstGeom>
+          <a:solidFill>
+            <a:srgbClr val="8FC1FF"/>
+          </a:solidFill>
+          <a:ln>
+            <a:noFill/>
+          </a:ln>
+        </p:spPr>
+        <p:txBody>
+          <a:bodyPr lIns="0" tIns="0" rIns="0" bIns="0" anchor="ctr"/>
+          <a:lstStyle/>
+          <a:p>
+            <a:endParaRPr lang="en-GB"/>
+          </a:p>
+        </p:txBody>
+      </p:sp>
+      <p:sp>
+        <p:nvSpPr>
+          <p:cNvPr id="21" name="Arrow 2"/>
+          <p:cNvSpPr/>
+          <p:nvPr/>
+        </p:nvSpPr>
+        <p:spPr>
+          <a:xfrm>
+            <a:off x="7863840" y="2606040"/>
+            <a:ext cx="274320" cy="365760"/>
+          </a:xfrm>
+          <a:prstGeom prst="rightArrow">
+            <a:avLst/>
+          </a:prstGeom>
+          <a:solidFill>
+            <a:srgbClr val="8FC1FF"/>
+          </a:solidFill>
+          <a:ln>
+            <a:noFill/>
+          </a:ln>
+        </p:spPr>
+        <p:txBody>
+          <a:bodyPr lIns="0" tIns="0" rIns="0" bIns="0" anchor="ctr"/>
+          <a:lstStyle/>
+          <a:p>
+            <a:endParaRPr lang="en-GB"/>
+          </a:p>
+        </p:txBody>
+      </p:sp>
+      <p:pic>
+        <p:nvPicPr>
+          <p:cNvPr id="22" name="Verified icon" descr="icon"/>
+          <p:cNvPicPr>
+            <a:picLocks noChangeAspect="1"/>
+          </p:cNvPicPr>
+          <p:nvPr/>
+        </p:nvPicPr>
+        <p:blipFill>
+          <a:blip r:embed="rId3"/>
+          <a:stretch>
+            <a:fillRect/>
+          </a:stretch>
+        </p:blipFill>
+        <p:spPr>
+          <a:xfrm>
+            <a:off x="8458200" y="2331720"/>
+            <a:ext cx="320040" cy="320040"/>
+          </a:xfrm>
+          <a:prstGeom prst="rect">
+            <a:avLst/>
+          </a:prstGeom>
+        </p:spPr>
+      </p:pic>
+      <p:sp>
+        <p:nvSpPr>
+          <p:cNvPr id="23" name="Outcome 1"/>
+          <p:cNvSpPr txBox="1"/>
+          <p:nvPr/>
+        </p:nvSpPr>
+        <p:spPr>
+          <a:xfrm>
+            <a:off x="8915400" y="2304288"/>
+            <a:ext cx="2468880" cy="374904"/>
+          </a:xfrm>
+          <a:prstGeom prst="rect">
+            <a:avLst/>
+          </a:prstGeom>
+          <a:noFill/>
+          <a:ln/>
+        </p:spPr>
+        <p:txBody>
+          <a:bodyPr wrap="square" lIns="0" tIns="0" rIns="0" bIns="0" rtlCol="0" anchor="ctr"/>
+          <a:lstStyle/>
+          <a:p>
+            <a:pPr marL="0" indent="0" algn="l">
+              <a:spcAft>
+                <a:spcPts val="0"/>
+              </a:spcAft>
+              <a:buNone/>
+            </a:pPr>
+            <a:r>
+              <a:rPr lang="en-US" sz="1600" b="1" kern="0" dirty="0">
+                <a:solidFill>
+                  <a:srgbClr val="F2F5FA"/>
+                </a:solidFill>
+                <a:latin typeface="Calibri" pitchFamily="34" charset="0"/>
+                <a:ea typeface="Calibri" pitchFamily="34" charset="-122"/>
+                <a:cs typeface="Calibri" pitchFamily="34" charset="-120"/>
+              </a:rPr>
+              <a:t>Verified: </a:t>
+            </a:r>
+            <a:r>
+              <a:rPr lang="en-US" sz="1600" kern="0" dirty="0">
+                <a:solidFill>
+                  <a:srgbClr val="F2F5FA"/>
+                </a:solidFill>
+                <a:latin typeface="Calibri" pitchFamily="34" charset="0"/>
+                <a:ea typeface="Calibri" pitchFamily="34" charset="-122"/>
+                <a:cs typeface="Calibri" pitchFamily="34" charset="-120"/>
+              </a:rPr>
+              <a:t>delivered</a:t>
+            </a:r>
+          </a:p>
+        </p:txBody>
+      </p:sp>
+      <p:sp>
+        <p:nvSpPr>
+          <p:cNvPr id="24" name="Flagged icon"/>
+          <p:cNvSpPr/>
+          <p:nvPr/>
+        </p:nvSpPr>
+        <p:spPr>
+          <a:xfrm>
+            <a:off x="8458200" y="2811780"/>
+            <a:ext cx="320040" cy="320040"/>
+          </a:xfrm>
+          <a:prstGeom prst="ellipse">
+            <a:avLst/>
+          </a:prstGeom>
+          <a:solidFill>
+            <a:srgbClr val="F7E23B"/>
+          </a:solidFill>
+          <a:ln>
+            <a:noFill/>
+          </a:ln>
+        </p:spPr>
+        <p:txBody>
+          <a:bodyPr lIns="0" tIns="0" rIns="0" bIns="0" anchor="ctr"/>
+          <a:lstStyle/>
+          <a:p>
+            <a:pPr algn="ctr"/>
+            <a:r>
+              <a:rPr lang="en-US" sz="1400" b="1" kern="0" dirty="0">
+                <a:solidFill>
+                  <a:srgbClr val="0B1B33"/>
+                </a:solidFill>
+                <a:latin typeface="Calibri" pitchFamily="34" charset="0"/>
+                <a:ea typeface="Calibri" pitchFamily="34" charset="-122"/>
+                <a:cs typeface="Calibri" pitchFamily="34" charset="-120"/>
+              </a:rPr>
+              <a:t>!</a:t>
+            </a:r>
+          </a:p>
+        </p:txBody>
+      </p:sp>
+      <p:sp>
+        <p:nvSpPr>
+          <p:cNvPr id="25" name="Outcome 2"/>
+          <p:cNvSpPr txBox="1"/>
+          <p:nvPr/>
+        </p:nvSpPr>
+        <p:spPr>
+          <a:xfrm>
+            <a:off x="8915400" y="2784348"/>
+            <a:ext cx="2468880" cy="374904"/>
+          </a:xfrm>
+          <a:prstGeom prst="rect">
+            <a:avLst/>
+          </a:prstGeom>
+          <a:noFill/>
+          <a:ln/>
+        </p:spPr>
+        <p:txBody>
+          <a:bodyPr wrap="square" lIns="0" tIns="0" rIns="0" bIns="0" rtlCol="0" anchor="ctr"/>
+          <a:lstStyle/>
+          <a:p>
+            <a:pPr marL="0" indent="0" algn="l">
+              <a:spcAft>
+                <a:spcPts val="0"/>
+              </a:spcAft>
+              <a:buNone/>
+            </a:pPr>
+            <a:r>
+              <a:rPr lang="en-US" sz="1600" b="1" kern="0" dirty="0">
+                <a:solidFill>
+                  <a:srgbClr val="F2F5FA"/>
+                </a:solidFill>
+                <a:latin typeface="Calibri" pitchFamily="34" charset="0"/>
+                <a:ea typeface="Calibri" pitchFamily="34" charset="-122"/>
+                <a:cs typeface="Calibri" pitchFamily="34" charset="-120"/>
+              </a:rPr>
+              <a:t>Flagged: </a:t>
+            </a:r>
+            <a:r>
+              <a:rPr lang="en-US" sz="1600" kern="0" dirty="0">
+                <a:solidFill>
+                  <a:srgbClr val="F2F5FA"/>
+                </a:solidFill>
+                <a:latin typeface="Calibri" pitchFamily="34" charset="0"/>
+                <a:ea typeface="Calibri" pitchFamily="34" charset="-122"/>
+                <a:cs typeface="Calibri" pitchFamily="34" charset="-120"/>
+              </a:rPr>
+              <a:t>with a warning</a:t>
+            </a:r>
+          </a:p>
+        </p:txBody>
+      </p:sp>
+      <p:pic>
+        <p:nvPicPr>
+          <p:cNvPr id="26" name="Withheld icon" descr="icon"/>
+          <p:cNvPicPr>
+            <a:picLocks noChangeAspect="1"/>
+          </p:cNvPicPr>
+          <p:nvPr/>
+        </p:nvPicPr>
+        <p:blipFill>
+          <a:blip r:embed="rId4"/>
+          <a:stretch>
+            <a:fillRect/>
+          </a:stretch>
+        </p:blipFill>
+        <p:spPr>
+          <a:xfrm>
+            <a:off x="8458200" y="3291840"/>
+            <a:ext cx="320040" cy="320040"/>
+          </a:xfrm>
+          <a:prstGeom prst="rect">
+            <a:avLst/>
+          </a:prstGeom>
+        </p:spPr>
+      </p:pic>
+      <p:sp>
+        <p:nvSpPr>
+          <p:cNvPr id="27" name="Outcome 3"/>
+          <p:cNvSpPr txBox="1"/>
+          <p:nvPr/>
+        </p:nvSpPr>
+        <p:spPr>
+          <a:xfrm>
+            <a:off x="8915400" y="3264408"/>
+            <a:ext cx="2468880" cy="374904"/>
+          </a:xfrm>
+          <a:prstGeom prst="rect">
+            <a:avLst/>
+          </a:prstGeom>
+          <a:noFill/>
+          <a:ln/>
+        </p:spPr>
+        <p:txBody>
+          <a:bodyPr wrap="square" lIns="0" tIns="0" rIns="0" bIns="0" rtlCol="0" anchor="ctr"/>
+          <a:lstStyle/>
+          <a:p>
+            <a:pPr marL="0" indent="0" algn="l">
+              <a:spcAft>
+                <a:spcPts val="0"/>
+              </a:spcAft>
+              <a:buNone/>
+            </a:pPr>
+            <a:r>
+              <a:rPr lang="en-US" sz="1600" b="1" kern="0" dirty="0">
+                <a:solidFill>
+                  <a:srgbClr val="F2F5FA"/>
+                </a:solidFill>
+                <a:latin typeface="Calibri" pitchFamily="34" charset="0"/>
+                <a:ea typeface="Calibri" pitchFamily="34" charset="-122"/>
+                <a:cs typeface="Calibri" pitchFamily="34" charset="-120"/>
+              </a:rPr>
+              <a:t>Withheld: </a:t>
+            </a:r>
+            <a:r>
+              <a:rPr lang="en-US" sz="1600" kern="0" dirty="0">
+                <a:solidFill>
+                  <a:srgbClr val="F2F5FA"/>
+                </a:solidFill>
+                <a:latin typeface="Calibri" pitchFamily="34" charset="0"/>
+                <a:ea typeface="Calibri" pitchFamily="34" charset="-122"/>
+                <a:cs typeface="Calibri" pitchFamily="34" charset="-120"/>
+              </a:rPr>
+              <a:t>held back</a:t>
+            </a:r>
+          </a:p>
+        </p:txBody>
+      </p:sp>
+      <p:sp>
+        <p:nvSpPr>
+          <p:cNvPr id="28" name="Fit card 1"/>
+          <p:cNvSpPr/>
+          <p:nvPr/>
+        </p:nvSpPr>
+        <p:spPr>
+          <a:xfrm>
+            <a:off x="548640" y="4069080"/>
+            <a:ext cx="3383280" cy="1325880"/>
+          </a:xfrm>
+          <a:prstGeom prst="roundRect">
+            <a:avLst>
+              <a:gd name="adj" fmla="val 4500"/>
+            </a:avLst>
+          </a:prstGeom>
+          <a:solidFill>
+            <a:srgbClr val="16294A"/>
+          </a:solidFill>
+          <a:ln w="12700">
+            <a:solidFill>
+              <a:srgbClr val="2B4470"/>
+            </a:solidFill>
+            <a:prstDash val="solid"/>
+          </a:ln>
+          <a:effectLst>
+            <a:outerShdw blurRad="152400" dist="38100" dir="5400000" algn="bl" rotWithShape="0">
+              <a:srgbClr val="000000">
+                <a:alpha val="35000"/>
+              </a:srgbClr>
+            </a:outerShdw>
+          </a:effectLst>
+        </p:spPr>
+        <p:txBody>
+          <a:bodyPr/>
+          <a:lstStyle/>
+          <a:p>
+            <a:endParaRPr lang="en-GB"/>
+          </a:p>
+        </p:txBody>
+      </p:sp>
+      <p:sp>
+        <p:nvSpPr>
+          <p:cNvPr id="29" name="Fit label 1"/>
+          <p:cNvSpPr txBox="1"/>
+          <p:nvPr/>
+        </p:nvSpPr>
+        <p:spPr>
+          <a:xfrm>
+            <a:off x="777240" y="4206240"/>
+            <a:ext cx="2926080" cy="274320"/>
+          </a:xfrm>
+          <a:prstGeom prst="rect">
+            <a:avLst/>
+          </a:prstGeom>
+          <a:noFill/>
+          <a:ln/>
+        </p:spPr>
+        <p:txBody>
+          <a:bodyPr wrap="square" lIns="0" tIns="0" rIns="0" bIns="0" rtlCol="0" anchor="t"/>
+          <a:lstStyle/>
+          <a:p>
+            <a:pPr marL="0" indent="0" algn="l">
+              <a:spcAft>
+                <a:spcPts val="0"/>
+              </a:spcAft>
+              <a:buNone/>
+            </a:pPr>
+            <a:r>
+              <a:rPr lang="en-US" sz="1200" b="1" kern="0" spc="150" dirty="0">
+                <a:solidFill>
+                  <a:srgbClr val="F7E23B"/>
+                </a:solidFill>
+                <a:latin typeface="Calibri" pitchFamily="34" charset="0"/>
+                <a:ea typeface="Calibri" pitchFamily="34" charset="-122"/>
+                <a:cs typeface="Calibri" pitchFamily="34" charset="-120"/>
+              </a:rPr>
+              <a:t>SPECIALISED</a:t>
+            </a:r>
+          </a:p>
+        </p:txBody>
+      </p:sp>
+      <p:sp>
+        <p:nvSpPr>
+          <p:cNvPr id="30" name="Fit text 1"/>
+          <p:cNvSpPr txBox="1"/>
+          <p:nvPr/>
+        </p:nvSpPr>
+        <p:spPr>
+          <a:xfrm>
+            <a:off x="777240" y="4526280"/>
+            <a:ext cx="2926080" cy="822960"/>
+          </a:xfrm>
+          <a:prstGeom prst="rect">
+            <a:avLst/>
+          </a:prstGeom>
+          <a:noFill/>
+          <a:ln/>
+        </p:spPr>
+        <p:txBody>
+          <a:bodyPr wrap="square" lIns="0" tIns="0" rIns="0" bIns="0" rtlCol="0" anchor="t"/>
+          <a:lstStyle/>
+          <a:p>
+            <a:pPr marL="0" indent="0" algn="l">
+              <a:spcAft>
+                <a:spcPts val="0"/>
+              </a:spcAft>
+              <a:buNone/>
+            </a:pPr>
+            <a:r>
+              <a:rPr lang="en-US" sz="1500" kern="0" dirty="0">
+                <a:solidFill>
+                  <a:srgbClr val="F2F5FA"/>
+                </a:solidFill>
+                <a:latin typeface="Calibri" pitchFamily="34" charset="0"/>
+                <a:ea typeface="Calibri" pitchFamily="34" charset="-122"/>
+                <a:cs typeface="Calibri" pitchFamily="34" charset="-120"/>
+              </a:rPr>
+              <a:t>One codebase and known contracts, so the checker is built around them, not around the whole internet.</a:t>
+            </a:r>
+          </a:p>
+        </p:txBody>
+      </p:sp>
+      <p:sp>
+        <p:nvSpPr>
+          <p:cNvPr id="31" name="Fit card 2"/>
+          <p:cNvSpPr/>
+          <p:nvPr/>
+        </p:nvSpPr>
+        <p:spPr>
+          <a:xfrm>
+            <a:off x="4389120" y="4069080"/>
+            <a:ext cx="3383280" cy="1325880"/>
+          </a:xfrm>
+          <a:prstGeom prst="roundRect">
+            <a:avLst>
+              <a:gd name="adj" fmla="val 4500"/>
+            </a:avLst>
+          </a:prstGeom>
+          <a:solidFill>
+            <a:srgbClr val="16294A"/>
+          </a:solidFill>
+          <a:ln w="12700">
+            <a:solidFill>
+              <a:srgbClr val="2B4470"/>
+            </a:solidFill>
+            <a:prstDash val="solid"/>
+          </a:ln>
+          <a:effectLst>
+            <a:outerShdw blurRad="152400" dist="38100" dir="5400000" algn="bl" rotWithShape="0">
+              <a:srgbClr val="000000">
+                <a:alpha val="35000"/>
+              </a:srgbClr>
+            </a:outerShdw>
+          </a:effectLst>
+        </p:spPr>
+        <p:txBody>
+          <a:bodyPr/>
+          <a:lstStyle/>
+          <a:p>
+            <a:endParaRPr lang="en-GB"/>
+          </a:p>
+        </p:txBody>
+      </p:sp>
+      <p:sp>
+        <p:nvSpPr>
+          <p:cNvPr id="32" name="Fit label 2"/>
+          <p:cNvSpPr txBox="1"/>
+          <p:nvPr/>
+        </p:nvSpPr>
+        <p:spPr>
+          <a:xfrm>
+            <a:off x="4617720" y="4206240"/>
+            <a:ext cx="2926080" cy="274320"/>
+          </a:xfrm>
+          <a:prstGeom prst="rect">
+            <a:avLst/>
+          </a:prstGeom>
+          <a:noFill/>
+          <a:ln/>
+        </p:spPr>
+        <p:txBody>
+          <a:bodyPr wrap="square" lIns="0" tIns="0" rIns="0" bIns="0" rtlCol="0" anchor="t"/>
+          <a:lstStyle/>
+          <a:p>
+            <a:pPr marL="0" indent="0" algn="l">
+              <a:spcAft>
+                <a:spcPts val="0"/>
+              </a:spcAft>
+              <a:buNone/>
+            </a:pPr>
+            <a:r>
+              <a:rPr lang="en-US" sz="1200" b="1" kern="0" spc="150" dirty="0">
+                <a:solidFill>
+                  <a:srgbClr val="F7E23B"/>
+                </a:solidFill>
+                <a:latin typeface="Calibri" pitchFamily="34" charset="0"/>
+                <a:ea typeface="Calibri" pitchFamily="34" charset="-122"/>
+                <a:cs typeface="Calibri" pitchFamily="34" charset="-120"/>
+              </a:rPr>
+              <a:t>STAYS CURRENT</a:t>
+            </a:r>
+          </a:p>
+        </p:txBody>
+      </p:sp>
+      <p:sp>
+        <p:nvSpPr>
+          <p:cNvPr id="33" name="Fit text 2"/>
+          <p:cNvSpPr txBox="1"/>
+          <p:nvPr/>
+        </p:nvSpPr>
+        <p:spPr>
+          <a:xfrm>
+            <a:off x="4617720" y="4526280"/>
+            <a:ext cx="2926080" cy="822960"/>
+          </a:xfrm>
+          <a:prstGeom prst="rect">
+            <a:avLst/>
+          </a:prstGeom>
+          <a:noFill/>
+          <a:ln/>
+        </p:spPr>
+        <p:txBody>
+          <a:bodyPr wrap="square" lIns="0" tIns="0" rIns="0" bIns="0" rtlCol="0" anchor="t"/>
+          <a:lstStyle/>
+          <a:p>
+            <a:pPr marL="0" indent="0" algn="l">
+              <a:spcAft>
+                <a:spcPts val="0"/>
+              </a:spcAft>
+              <a:buNone/>
+            </a:pPr>
+            <a:r>
+              <a:rPr lang="en-US" sz="1500" kern="0" dirty="0">
+                <a:solidFill>
+                  <a:srgbClr val="F2F5FA"/>
+                </a:solidFill>
+                <a:latin typeface="Calibri" pitchFamily="34" charset="0"/>
+                <a:ea typeface="Calibri" pitchFamily="34" charset="-122"/>
+                <a:cs typeface="Calibri" pitchFamily="34" charset="-120"/>
+              </a:rPr>
+              <a:t>Contracts change; a model’s training does not. Update the checker’s evidence, not the model.</a:t>
+            </a:r>
+          </a:p>
+        </p:txBody>
+      </p:sp>
+      <p:sp>
+        <p:nvSpPr>
+          <p:cNvPr id="34" name="Fit card 3"/>
+          <p:cNvSpPr/>
+          <p:nvPr/>
+        </p:nvSpPr>
+        <p:spPr>
+          <a:xfrm>
+            <a:off x="8229600" y="4069080"/>
+            <a:ext cx="3383280" cy="1325880"/>
+          </a:xfrm>
+          <a:prstGeom prst="roundRect">
+            <a:avLst>
+              <a:gd name="adj" fmla="val 4500"/>
+            </a:avLst>
+          </a:prstGeom>
+          <a:solidFill>
+            <a:srgbClr val="16294A"/>
+          </a:solidFill>
+          <a:ln w="12700">
+            <a:solidFill>
+              <a:srgbClr val="2B4470"/>
+            </a:solidFill>
+            <a:prstDash val="solid"/>
+          </a:ln>
+          <a:effectLst>
+            <a:outerShdw blurRad="152400" dist="38100" dir="5400000" algn="bl" rotWithShape="0">
+              <a:srgbClr val="000000">
+                <a:alpha val="35000"/>
+              </a:srgbClr>
+            </a:outerShdw>
+          </a:effectLst>
+        </p:spPr>
+        <p:txBody>
+          <a:bodyPr/>
+          <a:lstStyle/>
+          <a:p>
+            <a:endParaRPr lang="en-GB"/>
+          </a:p>
+        </p:txBody>
+      </p:sp>
+      <p:sp>
+        <p:nvSpPr>
+          <p:cNvPr id="35" name="Fit label 3"/>
+          <p:cNvSpPr txBox="1"/>
+          <p:nvPr/>
+        </p:nvSpPr>
+        <p:spPr>
+          <a:xfrm>
+            <a:off x="8458200" y="4206240"/>
+            <a:ext cx="2926080" cy="274320"/>
+          </a:xfrm>
+          <a:prstGeom prst="rect">
+            <a:avLst/>
+          </a:prstGeom>
+          <a:noFill/>
+          <a:ln/>
+        </p:spPr>
+        <p:txBody>
+          <a:bodyPr wrap="square" lIns="0" tIns="0" rIns="0" bIns="0" rtlCol="0" anchor="t"/>
+          <a:lstStyle/>
+          <a:p>
+            <a:pPr marL="0" indent="0" algn="l">
+              <a:spcAft>
+                <a:spcPts val="0"/>
+              </a:spcAft>
+              <a:buNone/>
+            </a:pPr>
+            <a:r>
+              <a:rPr lang="en-US" sz="1200" b="1" kern="0" spc="150" dirty="0">
+                <a:solidFill>
+                  <a:srgbClr val="F7E23B"/>
+                </a:solidFill>
+                <a:latin typeface="Calibri" pitchFamily="34" charset="0"/>
+                <a:ea typeface="Calibri" pitchFamily="34" charset="-122"/>
+                <a:cs typeface="Calibri" pitchFamily="34" charset="-120"/>
+              </a:rPr>
+              <a:t>CHEAP TO RUN</a:t>
+            </a:r>
+          </a:p>
+        </p:txBody>
+      </p:sp>
+      <p:sp>
+        <p:nvSpPr>
+          <p:cNvPr id="36" name="Fit text 3"/>
+          <p:cNvSpPr txBox="1"/>
+          <p:nvPr/>
+        </p:nvSpPr>
+        <p:spPr>
+          <a:xfrm>
+            <a:off x="8458200" y="4526280"/>
+            <a:ext cx="2926080" cy="822960"/>
+          </a:xfrm>
+          <a:prstGeom prst="rect">
+            <a:avLst/>
+          </a:prstGeom>
+          <a:noFill/>
+          <a:ln/>
+        </p:spPr>
+        <p:txBody>
+          <a:bodyPr wrap="square" lIns="0" tIns="0" rIns="0" bIns="0" rtlCol="0" anchor="t"/>
+          <a:lstStyle/>
+          <a:p>
+            <a:pPr marL="0" indent="0" algn="l">
+              <a:spcAft>
+                <a:spcPts val="0"/>
+              </a:spcAft>
+              <a:buNone/>
+            </a:pPr>
+            <a:r>
+              <a:rPr lang="en-US" sz="1500" kern="0" dirty="0">
+                <a:solidFill>
+                  <a:srgbClr val="F2F5FA"/>
+                </a:solidFill>
+                <a:latin typeface="Calibri" pitchFamily="34" charset="0"/>
+                <a:ea typeface="Calibri" pitchFamily="34" charset="-122"/>
+                <a:cs typeface="Calibri" pitchFamily="34" charset="-120"/>
+              </a:rPr>
+              <a:t>About one cent of local electricity per prompt in our tests. The real price is time: about six times longer.</a:t>
+            </a:r>
+          </a:p>
+        </p:txBody>
+      </p:sp>
+      <p:sp>
+        <p:nvSpPr>
+          <p:cNvPr id="37" name="Caveat"/>
+          <p:cNvSpPr txBox="1"/>
+          <p:nvPr/>
+        </p:nvSpPr>
+        <p:spPr>
+          <a:xfrm>
+            <a:off x="548640" y="5532120"/>
+            <a:ext cx="11064240" cy="320040"/>
+          </a:xfrm>
+          <a:prstGeom prst="rect">
+            <a:avLst/>
+          </a:prstGeom>
+          <a:noFill/>
+          <a:ln/>
+        </p:spPr>
+        <p:txBody>
+          <a:bodyPr wrap="square" lIns="0" tIns="0" rIns="0" bIns="0" rtlCol="0" anchor="t"/>
+          <a:lstStyle/>
+          <a:p>
+            <a:pPr marL="0" indent="0" algn="l">
+              <a:spcAft>
+                <a:spcPts val="0"/>
+              </a:spcAft>
+              <a:buNone/>
+            </a:pPr>
+            <a:r>
+              <a:rPr lang="en-US" sz="1500" i="1" kern="0" dirty="0">
+                <a:solidFill>
+                  <a:srgbClr val="9FB2CC"/>
+                </a:solidFill>
+                <a:latin typeface="Calibri" pitchFamily="34" charset="0"/>
+                <a:ea typeface="Calibri" pitchFamily="34" charset="-122"/>
+                <a:cs typeface="Calibri" pitchFamily="34" charset="-120"/>
+              </a:rPr>
+              <a:t>A sketch of one application, not something we tested: our evidence covers one model and six public APIs.</a:t>
+            </a:r>
+          </a:p>
+        </p:txBody>
+      </p:sp>
+      <p:sp>
+        <p:nvSpPr>
+          <p:cNvPr id="3" name="Slide Number Placeholder 0"/>
+          <p:cNvSpPr>
+            <a:spLocks noGrp="1"/>
+          </p:cNvSpPr>
+          <p:nvPr>
+            <p:ph type="sldNum" sz="quarter" idx="4294967295"/>
+          </p:nvPr>
+        </p:nvSpPr>
+        <p:spPr>
+          <a:xfrm>
+            <a:off x="11155680" y="6400800"/>
+            <a:ext cx="548640" cy="274320"/>
+          </a:xfrm>
+          <a:prstGeom prst="rect">
+            <a:avLst/>
+          </a:prstGeom>
+          <a:extLst>
+            <a:ext uri="{C572A759-6A51-4108-AA02-DFA0A04FC94B}">
+              <ma14:wrappingTextBoxFlag xmlns="" xmlns:ma14="http://schemas.microsoft.com/office/mac/drawingml/2011/main" val="0"/>
+            </a:ext>
+          </a:extLst>
+        </p:spPr>
+        <p:txBody>
+          <a:bodyPr/>
+          <a:lstStyle>
+            <a:lvl1pPr>
+              <a:defRPr sz="1000">
+                <a:solidFill>
+                  <a:srgbClr val="9FB2CC"/>
+                </a:solidFill>
+                <a:latin typeface="Calibri"/>
+                <a:ea typeface="Calibri"/>
+                <a:cs typeface="Calibri"/>
+              </a:defRPr>
+            </a:lvl1pPr>
+          </a:lstStyle>
+          <a:p>
+            <a:pPr algn="l"/>
+            <a:fld id="{F7021451-1387-4CA6-816F-3879F97B5CBC}" type="slidenum">
+              <a:rPr lang="en-US" b="0"/>
+              <a:t>24</a:t>
+            </a:fld>
+            <a:endParaRPr lang="en-US"/>
+          </a:p>
+        </p:txBody>
+      </p:sp>
+    </p:spTree>
+  </p:cSld>
+  <p:clrMapOvr>
+    <a:masterClrMapping/>
+  </p:clrMapOvr>
+</p:sld>
+</file>
+
+<file path=ppt/slides/slide25.xml><?xml version="1.0" encoding="utf-8"?>
+<p:sld xmlns:a="http://schemas.openxmlformats.org/drawingml/2006/main" xmlns:r="http://schemas.openxmlformats.org/officeDocument/2006/relationships" xmlns:p="http://schemas.openxmlformats.org/presentationml/2006/main">
+  <p:cSld name="Slide 22">
+    <p:spTree>
+      <p:nvGrpSpPr>
+        <p:cNvPr id="1" name=""/>
+        <p:cNvGrpSpPr/>
+        <p:nvPr/>
+      </p:nvGrpSpPr>
+      <p:grpSpPr>
+        <a:xfrm>
+          <a:off x="0" y="0"/>
+          <a:ext cx="0" cy="0"/>
+          <a:chOff x="0" y="0"/>
+          <a:chExt cx="0" cy="0"/>
+        </a:xfrm>
+      </p:grpSpPr>
+      <p:sp>
+        <p:nvSpPr>
+          <p:cNvPr id="2" name="Text 0"/>
+          <p:cNvSpPr>
+            <a:spLocks noGrp="1"/>
+          </p:cNvSpPr>
+          <p:nvPr>
+            <p:ph type="title" idx="100" hasCustomPrompt="1"/>
+          </p:nvPr>
+        </p:nvSpPr>
+        <p:spPr>
+          <a:xfrm>
+            <a:off x="548640" y="365760"/>
+            <a:ext cx="11064240" cy="868680"/>
+          </a:xfrm>
+          <a:prstGeom prst="rect">
+            <a:avLst/>
+          </a:prstGeom>
+          <a:noFill/>
+          <a:ln/>
+        </p:spPr>
+        <p:txBody>
+          <a:bodyPr wrap="square" lIns="0" tIns="0" rIns="0" bIns="0" rtlCol="0" anchor="ctr"/>
+          <a:lstStyle/>
+          <a:p>
+            <a:pPr marL="0" indent="0" algn="l">
+              <a:buNone/>
+            </a:pPr>
+            <a:r>
+              <a:rPr lang="en-US" sz="3400" b="1">
+                <a:solidFill>
+                  <a:srgbClr val="F2F5FA"/>
+                </a:solidFill>
+                <a:latin typeface="Cambria" pitchFamily="34" charset="0"/>
+                <a:ea typeface="Cambria" pitchFamily="34" charset="-122"/>
+                <a:cs typeface="Cambria" pitchFamily="34" charset="-120"/>
+              </a:rPr>
+              <a:t>Vibe coding summary</a:t>
+            </a:r>
+            <a:endParaRPr lang="en-US" sz="3400" dirty="0"/>
+          </a:p>
+        </p:txBody>
+      </p:sp>
+      <p:sp>
+        <p:nvSpPr>
+          <p:cNvPr id="11" name="Subtitle"/>
+          <p:cNvSpPr txBox="1"/>
+          <p:nvPr/>
+        </p:nvSpPr>
+        <p:spPr>
+          <a:xfrm>
+            <a:off x="548640" y="1234440"/>
+            <a:ext cx="11064240" cy="320040"/>
+          </a:xfrm>
+          <a:prstGeom prst="rect">
+            <a:avLst/>
+          </a:prstGeom>
+          <a:noFill/>
+          <a:ln/>
+        </p:spPr>
+        <p:txBody>
+          <a:bodyPr wrap="square" lIns="0" tIns="0" rIns="0" bIns="0" rtlCol="0" anchor="t"/>
+          <a:lstStyle/>
+          <a:p>
+            <a:pPr marL="0" indent="0" algn="l">
+              <a:spcAft>
+                <a:spcPts val="0"/>
+              </a:spcAft>
+              <a:buNone/>
+            </a:pPr>
+            <a:r>
+              <a:rPr lang="en-US" sz="1600" kern="0">
+                <a:solidFill>
+                  <a:srgbClr val="9FB2CC"/>
+                </a:solidFill>
+                <a:latin typeface="Calibri" pitchFamily="34" charset="0"/>
+                <a:ea typeface="Calibri" pitchFamily="34" charset="-122"/>
+                <a:cs typeface="Calibri" pitchFamily="34" charset="-120"/>
+              </a:rPr>
+              <a:t>How AI tools helped build the project, and how we kept control of the evidence</a:t>
+            </a:r>
+            <a:endParaRPr lang="en-US" sz="1600" kern="0" dirty="0">
+              <a:solidFill>
+                <a:srgbClr val="9FB2CC"/>
+              </a:solidFill>
+              <a:latin typeface="Calibri" pitchFamily="34" charset="0"/>
+              <a:ea typeface="Calibri" pitchFamily="34" charset="-122"/>
+              <a:cs typeface="Calibri" pitchFamily="34" charset="-120"/>
+            </a:endParaRPr>
+          </a:p>
+        </p:txBody>
+      </p:sp>
+      <p:sp>
+        <p:nvSpPr>
+          <p:cNvPr id="12" name="Flow card 1"/>
+          <p:cNvSpPr/>
+          <p:nvPr/>
+        </p:nvSpPr>
+        <p:spPr>
+          <a:xfrm>
+            <a:off x="548640" y="1737360"/>
+            <a:ext cx="3383280" cy="2103120"/>
+          </a:xfrm>
+          <a:prstGeom prst="roundRect">
+            <a:avLst>
+              <a:gd name="adj" fmla="val 4500"/>
+            </a:avLst>
+          </a:prstGeom>
+          <a:solidFill>
+            <a:srgbClr val="16294A"/>
+          </a:solidFill>
+          <a:ln w="12700">
+            <a:solidFill>
+              <a:srgbClr val="2B4470"/>
+            </a:solidFill>
+            <a:prstDash val="solid"/>
+          </a:ln>
+          <a:effectLst>
+            <a:outerShdw blurRad="152400" dist="38100" dir="5400000" algn="bl" rotWithShape="0">
+              <a:srgbClr val="000000">
+                <a:alpha val="35000"/>
+              </a:srgbClr>
+            </a:outerShdw>
+          </a:effectLst>
+        </p:spPr>
+        <p:txBody>
+          <a:bodyPr/>
+          <a:lstStyle/>
+          <a:p>
+            <a:endParaRPr lang="en-GB"/>
+          </a:p>
+        </p:txBody>
+      </p:sp>
+      <p:sp>
+        <p:nvSpPr>
+          <p:cNvPr id="13" name="Flow label 1"/>
+          <p:cNvSpPr txBox="1"/>
+          <p:nvPr/>
+        </p:nvSpPr>
+        <p:spPr>
+          <a:xfrm>
+            <a:off x="777240" y="1920240"/>
+            <a:ext cx="2926080" cy="274320"/>
+          </a:xfrm>
+          <a:prstGeom prst="rect">
+            <a:avLst/>
+          </a:prstGeom>
+          <a:noFill/>
+          <a:ln/>
+        </p:spPr>
+        <p:txBody>
+          <a:bodyPr wrap="square" lIns="0" tIns="0" rIns="0" bIns="0" rtlCol="0" anchor="t"/>
+          <a:lstStyle/>
+          <a:p>
+            <a:pPr marL="0" indent="0" algn="l">
+              <a:spcAft>
+                <a:spcPts val="0"/>
+              </a:spcAft>
+              <a:buNone/>
+            </a:pPr>
+            <a:r>
+              <a:rPr lang="en-US" sz="1200" b="1" kern="0" spc="150">
+                <a:solidFill>
+                  <a:srgbClr val="8FC1FF"/>
+                </a:solidFill>
+                <a:latin typeface="Calibri" pitchFamily="34" charset="0"/>
+                <a:ea typeface="Calibri" pitchFamily="34" charset="-122"/>
+                <a:cs typeface="Calibri" pitchFamily="34" charset="-120"/>
+              </a:rPr>
+              <a:t>1   WE DESIGNED</a:t>
+            </a:r>
+            <a:endParaRPr lang="en-US" sz="1200" b="1" kern="0" spc="150" dirty="0">
+              <a:solidFill>
+                <a:srgbClr val="8FC1FF"/>
+              </a:solidFill>
+              <a:latin typeface="Calibri" pitchFamily="34" charset="0"/>
+              <a:ea typeface="Calibri" pitchFamily="34" charset="-122"/>
+              <a:cs typeface="Calibri" pitchFamily="34" charset="-120"/>
+            </a:endParaRPr>
+          </a:p>
+        </p:txBody>
+      </p:sp>
+      <p:sp>
+        <p:nvSpPr>
+          <p:cNvPr id="14" name="Flow card 2"/>
+          <p:cNvSpPr/>
+          <p:nvPr/>
+        </p:nvSpPr>
+        <p:spPr>
+          <a:xfrm>
+            <a:off x="4389120" y="1737360"/>
+            <a:ext cx="3383280" cy="2103120"/>
+          </a:xfrm>
+          <a:prstGeom prst="roundRect">
+            <a:avLst>
+              <a:gd name="adj" fmla="val 4500"/>
+            </a:avLst>
+          </a:prstGeom>
+          <a:solidFill>
+            <a:srgbClr val="16294A"/>
+          </a:solidFill>
+          <a:ln w="19050">
+            <a:solidFill>
+              <a:srgbClr val="8FC1FF"/>
+            </a:solidFill>
+            <a:prstDash val="solid"/>
+          </a:ln>
+          <a:effectLst>
+            <a:outerShdw blurRad="152400" dist="38100" dir="5400000" algn="bl" rotWithShape="0">
+              <a:srgbClr val="000000">
+                <a:alpha val="35000"/>
+              </a:srgbClr>
+            </a:outerShdw>
+          </a:effectLst>
+        </p:spPr>
+        <p:txBody>
+          <a:bodyPr/>
+          <a:lstStyle/>
+          <a:p>
+            <a:endParaRPr lang="en-GB"/>
+          </a:p>
+        </p:txBody>
+      </p:sp>
+      <p:sp>
+        <p:nvSpPr>
+          <p:cNvPr id="15" name="Flow label 2"/>
+          <p:cNvSpPr txBox="1"/>
+          <p:nvPr/>
+        </p:nvSpPr>
+        <p:spPr>
+          <a:xfrm>
+            <a:off x="4617720" y="1920240"/>
+            <a:ext cx="2926080" cy="274320"/>
+          </a:xfrm>
+          <a:prstGeom prst="rect">
+            <a:avLst/>
+          </a:prstGeom>
+          <a:noFill/>
+          <a:ln/>
+        </p:spPr>
+        <p:txBody>
+          <a:bodyPr wrap="square" lIns="0" tIns="0" rIns="0" bIns="0" rtlCol="0" anchor="t"/>
+          <a:lstStyle/>
+          <a:p>
+            <a:pPr marL="0" indent="0" algn="l">
+              <a:spcAft>
+                <a:spcPts val="0"/>
+              </a:spcAft>
+              <a:buNone/>
+            </a:pPr>
+            <a:r>
+              <a:rPr lang="en-US" sz="1200" b="1" kern="0" spc="150">
+                <a:solidFill>
+                  <a:srgbClr val="8FC1FF"/>
+                </a:solidFill>
+                <a:latin typeface="Calibri" pitchFamily="34" charset="0"/>
+                <a:ea typeface="Calibri" pitchFamily="34" charset="-122"/>
+                <a:cs typeface="Calibri" pitchFamily="34" charset="-120"/>
+              </a:rPr>
+              <a:t>2   AI HELPED BUILD</a:t>
+            </a:r>
+            <a:endParaRPr lang="en-US" sz="1200" b="1" kern="0" spc="150" dirty="0">
+              <a:solidFill>
+                <a:srgbClr val="8FC1FF"/>
+              </a:solidFill>
+              <a:latin typeface="Calibri" pitchFamily="34" charset="0"/>
+              <a:ea typeface="Calibri" pitchFamily="34" charset="-122"/>
+              <a:cs typeface="Calibri" pitchFamily="34" charset="-120"/>
+            </a:endParaRPr>
+          </a:p>
+        </p:txBody>
+      </p:sp>
+      <p:sp>
+        <p:nvSpPr>
+          <p:cNvPr id="16" name="Flow card 3"/>
+          <p:cNvSpPr/>
+          <p:nvPr/>
+        </p:nvSpPr>
+        <p:spPr>
+          <a:xfrm>
+            <a:off x="8229600" y="1737360"/>
+            <a:ext cx="3383280" cy="2103120"/>
+          </a:xfrm>
+          <a:prstGeom prst="roundRect">
+            <a:avLst>
+              <a:gd name="adj" fmla="val 4500"/>
+            </a:avLst>
+          </a:prstGeom>
+          <a:solidFill>
+            <a:srgbClr val="16294A"/>
+          </a:solidFill>
+          <a:ln w="12700">
+            <a:solidFill>
+              <a:srgbClr val="2B4470"/>
+            </a:solidFill>
+            <a:prstDash val="solid"/>
+          </a:ln>
+          <a:effectLst>
+            <a:outerShdw blurRad="152400" dist="38100" dir="5400000" algn="bl" rotWithShape="0">
+              <a:srgbClr val="000000">
+                <a:alpha val="35000"/>
+              </a:srgbClr>
+            </a:outerShdw>
+          </a:effectLst>
+        </p:spPr>
+        <p:txBody>
+          <a:bodyPr/>
+          <a:lstStyle/>
+          <a:p>
+            <a:endParaRPr lang="en-GB"/>
+          </a:p>
+        </p:txBody>
+      </p:sp>
+      <p:sp>
+        <p:nvSpPr>
+          <p:cNvPr id="17" name="Flow label 3"/>
+          <p:cNvSpPr txBox="1"/>
+          <p:nvPr/>
+        </p:nvSpPr>
+        <p:spPr>
+          <a:xfrm>
+            <a:off x="8458200" y="1920240"/>
+            <a:ext cx="2926080" cy="274320"/>
+          </a:xfrm>
+          <a:prstGeom prst="rect">
+            <a:avLst/>
+          </a:prstGeom>
+          <a:noFill/>
+          <a:ln/>
+        </p:spPr>
+        <p:txBody>
+          <a:bodyPr wrap="square" lIns="0" tIns="0" rIns="0" bIns="0" rtlCol="0" anchor="t"/>
+          <a:lstStyle/>
+          <a:p>
+            <a:pPr marL="0" indent="0" algn="l">
+              <a:spcAft>
+                <a:spcPts val="0"/>
+              </a:spcAft>
+              <a:buNone/>
+            </a:pPr>
+            <a:r>
+              <a:rPr lang="en-US" sz="1200" b="1" kern="0" spc="150">
+                <a:solidFill>
+                  <a:srgbClr val="8FC1FF"/>
+                </a:solidFill>
+                <a:latin typeface="Calibri" pitchFamily="34" charset="0"/>
+                <a:ea typeface="Calibri" pitchFamily="34" charset="-122"/>
+                <a:cs typeface="Calibri" pitchFamily="34" charset="-120"/>
+              </a:rPr>
+              <a:t>3   WE CHECKED IT</a:t>
+            </a:r>
+            <a:endParaRPr lang="en-US" sz="1200" b="1" kern="0" spc="150" dirty="0">
+              <a:solidFill>
+                <a:srgbClr val="8FC1FF"/>
+              </a:solidFill>
+              <a:latin typeface="Calibri" pitchFamily="34" charset="0"/>
+              <a:ea typeface="Calibri" pitchFamily="34" charset="-122"/>
+              <a:cs typeface="Calibri" pitchFamily="34" charset="-120"/>
+            </a:endParaRPr>
+          </a:p>
+        </p:txBody>
+      </p:sp>
+      <p:sp>
+        <p:nvSpPr>
+          <p:cNvPr id="18" name="Flow text 1"/>
+          <p:cNvSpPr txBox="1"/>
+          <p:nvPr/>
+        </p:nvSpPr>
+        <p:spPr>
+          <a:xfrm>
+            <a:off x="777240" y="2377440"/>
+            <a:ext cx="2926080" cy="1371600"/>
+          </a:xfrm>
+          <a:prstGeom prst="rect">
+            <a:avLst/>
+          </a:prstGeom>
+          <a:noFill/>
+          <a:ln/>
+        </p:spPr>
+        <p:txBody>
+          <a:bodyPr wrap="square" lIns="0" tIns="0" rIns="0" bIns="0" rtlCol="0" anchor="t"/>
+          <a:lstStyle/>
+          <a:p>
+            <a:pPr marL="0" indent="0" algn="l">
+              <a:spcAft>
+                <a:spcPts val="0"/>
+              </a:spcAft>
+              <a:buNone/>
+            </a:pPr>
+            <a:r>
+              <a:rPr lang="en-US" sz="1800" kern="0">
+                <a:solidFill>
+                  <a:srgbClr val="F2F5FA"/>
+                </a:solidFill>
+                <a:latin typeface="Calibri" pitchFamily="34" charset="0"/>
+                <a:ea typeface="Calibri" pitchFamily="34" charset="-122"/>
+                <a:cs typeface="Calibri" pitchFamily="34" charset="-120"/>
+              </a:rPr>
+              <a:t>Domain, hypotheses, evaluation plan and scoring rules were decided by the group and fixed before the main runs.</a:t>
+            </a:r>
+            <a:endParaRPr lang="en-US" sz="1800" kern="0" dirty="0">
+              <a:solidFill>
+                <a:srgbClr val="F2F5FA"/>
+              </a:solidFill>
+              <a:latin typeface="Calibri" pitchFamily="34" charset="0"/>
+              <a:ea typeface="Calibri" pitchFamily="34" charset="-122"/>
+              <a:cs typeface="Calibri" pitchFamily="34" charset="-120"/>
+            </a:endParaRPr>
+          </a:p>
+        </p:txBody>
+      </p:sp>
+      <p:sp>
+        <p:nvSpPr>
+          <p:cNvPr id="19" name="Flow text 2"/>
+          <p:cNvSpPr txBox="1"/>
+          <p:nvPr/>
+        </p:nvSpPr>
+        <p:spPr>
+          <a:xfrm>
+            <a:off x="4617720" y="2377440"/>
+            <a:ext cx="2926080" cy="1371600"/>
+          </a:xfrm>
+          <a:prstGeom prst="rect">
+            <a:avLst/>
+          </a:prstGeom>
+          <a:noFill/>
+          <a:ln/>
+        </p:spPr>
+        <p:txBody>
+          <a:bodyPr wrap="square" lIns="0" tIns="0" rIns="0" bIns="0" rtlCol="0" anchor="t"/>
+          <a:lstStyle/>
+          <a:p>
+            <a:pPr marL="0" indent="0" algn="l">
+              <a:spcAft>
+                <a:spcPts val="0"/>
+              </a:spcAft>
+              <a:buNone/>
+            </a:pPr>
+            <a:r>
+              <a:rPr lang="en-US" sz="1800" kern="0">
+                <a:solidFill>
+                  <a:srgbClr val="F2F5FA"/>
+                </a:solidFill>
+                <a:latin typeface="Calibri" pitchFamily="34" charset="0"/>
+                <a:ea typeface="Calibri" pitchFamily="34" charset="-122"/>
+                <a:cs typeface="Calibri" pitchFamily="34" charset="-120"/>
+              </a:rPr>
+              <a:t>Claude Code wrote, tested and debugged the toolbox, benchmark, evaluator and analysis scripts. DeepSeek and ChatGPT for design talks.</a:t>
+            </a:r>
+            <a:endParaRPr lang="en-US" sz="1800" kern="0" dirty="0">
+              <a:solidFill>
+                <a:srgbClr val="F2F5FA"/>
+              </a:solidFill>
+              <a:latin typeface="Calibri" pitchFamily="34" charset="0"/>
+              <a:ea typeface="Calibri" pitchFamily="34" charset="-122"/>
+              <a:cs typeface="Calibri" pitchFamily="34" charset="-120"/>
+            </a:endParaRPr>
+          </a:p>
+        </p:txBody>
+      </p:sp>
+      <p:sp>
+        <p:nvSpPr>
+          <p:cNvPr id="20" name="Arrow 1"/>
+          <p:cNvSpPr/>
+          <p:nvPr/>
+        </p:nvSpPr>
+        <p:spPr>
+          <a:xfrm>
+            <a:off x="4023360" y="2606040"/>
+            <a:ext cx="274320" cy="365760"/>
+          </a:xfrm>
+          <a:prstGeom prst="rightArrow">
+            <a:avLst/>
+          </a:prstGeom>
+          <a:solidFill>
+            <a:srgbClr val="8FC1FF"/>
+          </a:solidFill>
+          <a:ln>
+            <a:noFill/>
+          </a:ln>
+        </p:spPr>
+        <p:txBody>
+          <a:bodyPr lIns="0" tIns="0" rIns="0" bIns="0" anchor="ctr"/>
+          <a:lstStyle/>
+          <a:p>
+            <a:endParaRPr lang="en-GB"/>
+          </a:p>
+        </p:txBody>
+      </p:sp>
+      <p:sp>
+        <p:nvSpPr>
+          <p:cNvPr id="21" name="Arrow 2"/>
+          <p:cNvSpPr/>
+          <p:nvPr/>
+        </p:nvSpPr>
+        <p:spPr>
+          <a:xfrm>
+            <a:off x="7863840" y="2606040"/>
+            <a:ext cx="274320" cy="365760"/>
+          </a:xfrm>
+          <a:prstGeom prst="rightArrow">
+            <a:avLst/>
+          </a:prstGeom>
+          <a:solidFill>
+            <a:srgbClr val="8FC1FF"/>
+          </a:solidFill>
+          <a:ln>
+            <a:noFill/>
+          </a:ln>
+        </p:spPr>
+        <p:txBody>
+          <a:bodyPr lIns="0" tIns="0" rIns="0" bIns="0" anchor="ctr"/>
+          <a:lstStyle/>
+          <a:p>
+            <a:endParaRPr lang="en-GB"/>
+          </a:p>
+        </p:txBody>
+      </p:sp>
+      <p:pic>
+        <p:nvPicPr>
+          <p:cNvPr id="22" name="Verified icon" descr="icon"/>
+          <p:cNvPicPr>
+            <a:picLocks noChangeAspect="1"/>
+          </p:cNvPicPr>
+          <p:nvPr/>
+        </p:nvPicPr>
+        <p:blipFill>
+          <a:blip r:embed="rId3"/>
+          <a:stretch>
+            <a:fillRect/>
+          </a:stretch>
+        </p:blipFill>
+        <p:spPr>
+          <a:xfrm>
+            <a:off x="8458200" y="2331720"/>
+            <a:ext cx="320040" cy="320040"/>
+          </a:xfrm>
+          <a:prstGeom prst="rect">
+            <a:avLst/>
+          </a:prstGeom>
+        </p:spPr>
+      </p:pic>
+      <p:sp>
+        <p:nvSpPr>
+          <p:cNvPr id="23" name="Outcome 1"/>
+          <p:cNvSpPr txBox="1"/>
+          <p:nvPr/>
+        </p:nvSpPr>
+        <p:spPr>
+          <a:xfrm>
+            <a:off x="8915400" y="2304288"/>
+            <a:ext cx="2468880" cy="374904"/>
+          </a:xfrm>
+          <a:prstGeom prst="rect">
+            <a:avLst/>
+          </a:prstGeom>
+          <a:noFill/>
+          <a:ln/>
+        </p:spPr>
+        <p:txBody>
+          <a:bodyPr wrap="square" lIns="0" tIns="0" rIns="0" bIns="0" rtlCol="0" anchor="ctr"/>
+          <a:lstStyle/>
+          <a:p>
+            <a:pPr marL="0" indent="0" algn="l">
+              <a:spcAft>
+                <a:spcPts val="0"/>
+              </a:spcAft>
+              <a:buNone/>
+            </a:pPr>
+            <a:r>
+              <a:rPr lang="en-US" sz="1600" b="1" kern="0">
+                <a:solidFill>
+                  <a:srgbClr val="F2F5FA"/>
+                </a:solidFill>
+                <a:latin typeface="Calibri" pitchFamily="34" charset="0"/>
+                <a:ea typeface="Calibri" pitchFamily="34" charset="-122"/>
+                <a:cs typeface="Calibri" pitchFamily="34" charset="-120"/>
+              </a:rPr>
+              <a:t>1,000 / 1,000</a:t>
+            </a:r>
+            <a:r>
+              <a:rPr lang="en-US" sz="1600" kern="0">
+                <a:solidFill>
+                  <a:srgbClr val="F2F5FA"/>
+                </a:solidFill>
+                <a:latin typeface="Calibri" pitchFamily="34" charset="0"/>
+                <a:ea typeface="Calibri" pitchFamily="34" charset="-122"/>
+                <a:cs typeface="Calibri" pitchFamily="34" charset="-120"/>
+              </a:rPr>
+              <a:t> references pass</a:t>
+            </a:r>
+            <a:endParaRPr lang="en-US" sz="1600" kern="0" dirty="0">
+              <a:solidFill>
+                <a:srgbClr val="F2F5FA"/>
+              </a:solidFill>
+              <a:latin typeface="Calibri" pitchFamily="34" charset="0"/>
+              <a:ea typeface="Calibri" pitchFamily="34" charset="-122"/>
+              <a:cs typeface="Calibri" pitchFamily="34" charset="-120"/>
+            </a:endParaRPr>
+          </a:p>
+        </p:txBody>
+      </p:sp>
+      <p:sp>
+        <p:nvSpPr>
+          <p:cNvPr id="24" name="Flagged icon"/>
+          <p:cNvSpPr/>
+          <p:nvPr/>
+        </p:nvSpPr>
+        <p:spPr>
+          <a:xfrm>
+            <a:off x="8458200" y="2811780"/>
+            <a:ext cx="320040" cy="320040"/>
+          </a:xfrm>
+          <a:prstGeom prst="ellipse">
+            <a:avLst/>
+          </a:prstGeom>
+          <a:solidFill>
+            <a:srgbClr val="F7E23B"/>
+          </a:solidFill>
+          <a:ln>
+            <a:noFill/>
+          </a:ln>
+        </p:spPr>
+        <p:txBody>
+          <a:bodyPr lIns="0" tIns="0" rIns="0" bIns="0" anchor="ctr"/>
+          <a:lstStyle/>
+          <a:p>
+            <a:pPr algn="ctr"/>
+            <a:r>
+              <a:rPr lang="en-US" sz="1400" b="1" kern="0" dirty="0">
+                <a:solidFill>
+                  <a:srgbClr val="0B1B33"/>
+                </a:solidFill>
+                <a:latin typeface="Calibri" pitchFamily="34" charset="0"/>
+                <a:ea typeface="Calibri" pitchFamily="34" charset="-122"/>
+                <a:cs typeface="Calibri" pitchFamily="34" charset="-120"/>
+              </a:rPr>
+              <a:t>!</a:t>
+            </a:r>
+          </a:p>
+        </p:txBody>
+      </p:sp>
+      <p:sp>
+        <p:nvSpPr>
+          <p:cNvPr id="25" name="Outcome 2"/>
+          <p:cNvSpPr txBox="1"/>
+          <p:nvPr/>
+        </p:nvSpPr>
+        <p:spPr>
+          <a:xfrm>
+            <a:off x="8915400" y="2784348"/>
+            <a:ext cx="2468880" cy="374904"/>
+          </a:xfrm>
+          <a:prstGeom prst="rect">
+            <a:avLst/>
+          </a:prstGeom>
+          <a:noFill/>
+          <a:ln/>
+        </p:spPr>
+        <p:txBody>
+          <a:bodyPr wrap="square" lIns="0" tIns="0" rIns="0" bIns="0" rtlCol="0" anchor="ctr"/>
+          <a:lstStyle/>
+          <a:p>
+            <a:pPr marL="0" indent="0" algn="l">
+              <a:spcAft>
+                <a:spcPts val="0"/>
+              </a:spcAft>
+              <a:buNone/>
+            </a:pPr>
+            <a:r>
+              <a:rPr lang="en-US" sz="1600" b="1" kern="0">
+                <a:solidFill>
+                  <a:srgbClr val="F2F5FA"/>
+                </a:solidFill>
+                <a:latin typeface="Calibri" pitchFamily="34" charset="0"/>
+                <a:ea typeface="Calibri" pitchFamily="34" charset="-122"/>
+                <a:cs typeface="Calibri" pitchFamily="34" charset="-120"/>
+              </a:rPr>
+              <a:t>3,000</a:t>
+            </a:r>
+            <a:r>
+              <a:rPr lang="en-US" sz="1600" kern="0">
+                <a:solidFill>
+                  <a:srgbClr val="F2F5FA"/>
+                </a:solidFill>
+                <a:latin typeface="Calibri" pitchFamily="34" charset="0"/>
+                <a:ea typeface="Calibri" pitchFamily="34" charset="-122"/>
+                <a:cs typeface="Calibri" pitchFamily="34" charset="-120"/>
+              </a:rPr>
+              <a:t> broken programs blocked</a:t>
+            </a:r>
+            <a:endParaRPr lang="en-US" sz="1600" kern="0" dirty="0">
+              <a:solidFill>
+                <a:srgbClr val="F2F5FA"/>
+              </a:solidFill>
+              <a:latin typeface="Calibri" pitchFamily="34" charset="0"/>
+              <a:ea typeface="Calibri" pitchFamily="34" charset="-122"/>
+              <a:cs typeface="Calibri" pitchFamily="34" charset="-120"/>
+            </a:endParaRPr>
+          </a:p>
+        </p:txBody>
+      </p:sp>
+      <p:pic>
+        <p:nvPicPr>
+          <p:cNvPr id="26" name="Withheld icon" descr="icon"/>
+          <p:cNvPicPr>
+            <a:picLocks noChangeAspect="1"/>
+          </p:cNvPicPr>
+          <p:nvPr/>
+        </p:nvPicPr>
+        <p:blipFill>
+          <a:blip r:embed="rId4"/>
+          <a:stretch>
+            <a:fillRect/>
+          </a:stretch>
+        </p:blipFill>
+        <p:spPr>
+          <a:xfrm>
+            <a:off x="8458200" y="3291840"/>
+            <a:ext cx="320040" cy="320040"/>
+          </a:xfrm>
+          <a:prstGeom prst="rect">
+            <a:avLst/>
+          </a:prstGeom>
+        </p:spPr>
+      </p:pic>
+      <p:sp>
+        <p:nvSpPr>
+          <p:cNvPr id="27" name="Outcome 3"/>
+          <p:cNvSpPr txBox="1"/>
+          <p:nvPr/>
+        </p:nvSpPr>
+        <p:spPr>
+          <a:xfrm>
+            <a:off x="8915400" y="3264408"/>
+            <a:ext cx="2468880" cy="374904"/>
+          </a:xfrm>
+          <a:prstGeom prst="rect">
+            <a:avLst/>
+          </a:prstGeom>
+          <a:noFill/>
+          <a:ln/>
+        </p:spPr>
+        <p:txBody>
+          <a:bodyPr wrap="square" lIns="0" tIns="0" rIns="0" bIns="0" rtlCol="0" anchor="ctr"/>
+          <a:lstStyle/>
+          <a:p>
+            <a:pPr marL="0" indent="0" algn="l">
+              <a:spcAft>
+                <a:spcPts val="0"/>
+              </a:spcAft>
+              <a:buNone/>
+            </a:pPr>
+            <a:r>
+              <a:rPr lang="en-US" sz="1600" b="1" kern="0">
+                <a:solidFill>
+                  <a:srgbClr val="F2F5FA"/>
+                </a:solidFill>
+                <a:latin typeface="Calibri" pitchFamily="34" charset="0"/>
+                <a:ea typeface="Calibri" pitchFamily="34" charset="-122"/>
+                <a:cs typeface="Calibri" pitchFamily="34" charset="-120"/>
+              </a:rPr>
+              <a:t>13</a:t>
+            </a:r>
+            <a:r>
+              <a:rPr lang="en-US" sz="1600" kern="0">
+                <a:solidFill>
+                  <a:srgbClr val="F2F5FA"/>
+                </a:solidFill>
+                <a:latin typeface="Calibri" pitchFamily="34" charset="0"/>
+                <a:ea typeface="Calibri" pitchFamily="34" charset="-122"/>
+                <a:cs typeface="Calibri" pitchFamily="34" charset="-120"/>
+              </a:rPr>
+              <a:t> scoring defects fixed</a:t>
+            </a:r>
+            <a:endParaRPr lang="en-US" sz="1600" kern="0" dirty="0">
+              <a:solidFill>
+                <a:srgbClr val="F2F5FA"/>
+              </a:solidFill>
+              <a:latin typeface="Calibri" pitchFamily="34" charset="0"/>
+              <a:ea typeface="Calibri" pitchFamily="34" charset="-122"/>
+              <a:cs typeface="Calibri" pitchFamily="34" charset="-120"/>
+            </a:endParaRPr>
+          </a:p>
+        </p:txBody>
+      </p:sp>
+      <p:sp>
+        <p:nvSpPr>
+          <p:cNvPr id="28" name="Fit card 1"/>
+          <p:cNvSpPr/>
+          <p:nvPr/>
+        </p:nvSpPr>
+        <p:spPr>
+          <a:xfrm>
+            <a:off x="548640" y="4069080"/>
+            <a:ext cx="3383280" cy="1325880"/>
+          </a:xfrm>
+          <a:prstGeom prst="roundRect">
+            <a:avLst>
+              <a:gd name="adj" fmla="val 4500"/>
+            </a:avLst>
+          </a:prstGeom>
+          <a:solidFill>
+            <a:srgbClr val="16294A"/>
+          </a:solidFill>
+          <a:ln w="12700">
+            <a:solidFill>
+              <a:srgbClr val="2B4470"/>
+            </a:solidFill>
+            <a:prstDash val="solid"/>
+          </a:ln>
+          <a:effectLst>
+            <a:outerShdw blurRad="152400" dist="38100" dir="5400000" algn="bl" rotWithShape="0">
+              <a:srgbClr val="000000">
+                <a:alpha val="35000"/>
+              </a:srgbClr>
+            </a:outerShdw>
+          </a:effectLst>
+        </p:spPr>
+        <p:txBody>
+          <a:bodyPr/>
+          <a:lstStyle/>
+          <a:p>
+            <a:endParaRPr lang="en-GB"/>
+          </a:p>
+        </p:txBody>
+      </p:sp>
+      <p:sp>
+        <p:nvSpPr>
+          <p:cNvPr id="29" name="Fit label 1"/>
+          <p:cNvSpPr txBox="1"/>
+          <p:nvPr/>
+        </p:nvSpPr>
+        <p:spPr>
+          <a:xfrm>
+            <a:off x="777240" y="4206240"/>
+            <a:ext cx="2926080" cy="274320"/>
+          </a:xfrm>
+          <a:prstGeom prst="rect">
+            <a:avLst/>
+          </a:prstGeom>
+          <a:noFill/>
+          <a:ln/>
+        </p:spPr>
+        <p:txBody>
+          <a:bodyPr wrap="square" lIns="0" tIns="0" rIns="0" bIns="0" rtlCol="0" anchor="t"/>
+          <a:lstStyle/>
+          <a:p>
+            <a:pPr marL="0" indent="0" algn="l">
+              <a:spcAft>
+                <a:spcPts val="0"/>
+              </a:spcAft>
+              <a:buNone/>
+            </a:pPr>
+            <a:r>
+              <a:rPr lang="en-US" sz="1200" b="1" kern="0" spc="150">
+                <a:solidFill>
+                  <a:srgbClr val="F7E23B"/>
+                </a:solidFill>
+                <a:latin typeface="Calibri" pitchFamily="34" charset="0"/>
+                <a:ea typeface="Calibri" pitchFamily="34" charset="-122"/>
+                <a:cs typeface="Calibri" pitchFamily="34" charset="-120"/>
+              </a:rPr>
+              <a:t>WHAT WORKED</a:t>
+            </a:r>
+            <a:endParaRPr lang="en-US" sz="1200" b="1" kern="0" spc="150" dirty="0">
+              <a:solidFill>
+                <a:srgbClr val="F7E23B"/>
+              </a:solidFill>
+              <a:latin typeface="Calibri" pitchFamily="34" charset="0"/>
+              <a:ea typeface="Calibri" pitchFamily="34" charset="-122"/>
+              <a:cs typeface="Calibri" pitchFamily="34" charset="-120"/>
+            </a:endParaRPr>
+          </a:p>
+        </p:txBody>
+      </p:sp>
+      <p:sp>
+        <p:nvSpPr>
+          <p:cNvPr id="30" name="Fit text 1"/>
+          <p:cNvSpPr txBox="1"/>
+          <p:nvPr/>
+        </p:nvSpPr>
+        <p:spPr>
+          <a:xfrm>
+            <a:off x="777240" y="4526280"/>
+            <a:ext cx="2926080" cy="822960"/>
+          </a:xfrm>
+          <a:prstGeom prst="rect">
+            <a:avLst/>
+          </a:prstGeom>
+          <a:noFill/>
+          <a:ln/>
+        </p:spPr>
+        <p:txBody>
+          <a:bodyPr wrap="square" lIns="0" tIns="0" rIns="0" bIns="0" rtlCol="0" anchor="t"/>
+          <a:lstStyle/>
+          <a:p>
+            <a:pPr marL="0" indent="0" algn="l">
+              <a:spcAft>
+                <a:spcPts val="0"/>
+              </a:spcAft>
+              <a:buNone/>
+            </a:pPr>
+            <a:r>
+              <a:rPr lang="en-US" sz="1500" kern="0">
+                <a:solidFill>
+                  <a:srgbClr val="F2F5FA"/>
+                </a:solidFill>
+                <a:latin typeface="Calibri" pitchFamily="34" charset="0"/>
+                <a:ea typeface="Calibri" pitchFamily="34" charset="-122"/>
+                <a:cs typeface="Calibri" pitchFamily="34" charset="-120"/>
+              </a:rPr>
+              <a:t>Tools, tests and charts in days; every number regenerated from the raw runs.</a:t>
+            </a:r>
+            <a:endParaRPr lang="en-US" sz="1500" kern="0" dirty="0">
+              <a:solidFill>
+                <a:srgbClr val="F2F5FA"/>
+              </a:solidFill>
+              <a:latin typeface="Calibri" pitchFamily="34" charset="0"/>
+              <a:ea typeface="Calibri" pitchFamily="34" charset="-122"/>
+              <a:cs typeface="Calibri" pitchFamily="34" charset="-120"/>
+            </a:endParaRPr>
+          </a:p>
+        </p:txBody>
+      </p:sp>
+      <p:sp>
+        <p:nvSpPr>
+          <p:cNvPr id="31" name="Fit card 2"/>
+          <p:cNvSpPr/>
+          <p:nvPr/>
+        </p:nvSpPr>
+        <p:spPr>
+          <a:xfrm>
+            <a:off x="4389120" y="4069080"/>
+            <a:ext cx="3383280" cy="1325880"/>
+          </a:xfrm>
+          <a:prstGeom prst="roundRect">
+            <a:avLst>
+              <a:gd name="adj" fmla="val 4500"/>
+            </a:avLst>
+          </a:prstGeom>
+          <a:solidFill>
+            <a:srgbClr val="16294A"/>
+          </a:solidFill>
+          <a:ln w="12700">
+            <a:solidFill>
+              <a:srgbClr val="2B4470"/>
+            </a:solidFill>
+            <a:prstDash val="solid"/>
+          </a:ln>
+          <a:effectLst>
+            <a:outerShdw blurRad="152400" dist="38100" dir="5400000" algn="bl" rotWithShape="0">
+              <a:srgbClr val="000000">
+                <a:alpha val="35000"/>
+              </a:srgbClr>
+            </a:outerShdw>
+          </a:effectLst>
+        </p:spPr>
+        <p:txBody>
+          <a:bodyPr/>
+          <a:lstStyle/>
+          <a:p>
+            <a:endParaRPr lang="en-GB"/>
+          </a:p>
+        </p:txBody>
+      </p:sp>
+      <p:sp>
+        <p:nvSpPr>
+          <p:cNvPr id="32" name="Fit label 2"/>
+          <p:cNvSpPr txBox="1"/>
+          <p:nvPr/>
+        </p:nvSpPr>
+        <p:spPr>
+          <a:xfrm>
+            <a:off x="4617720" y="4206240"/>
+            <a:ext cx="2926080" cy="274320"/>
+          </a:xfrm>
+          <a:prstGeom prst="rect">
+            <a:avLst/>
+          </a:prstGeom>
+          <a:noFill/>
+          <a:ln/>
+        </p:spPr>
+        <p:txBody>
+          <a:bodyPr wrap="square" lIns="0" tIns="0" rIns="0" bIns="0" rtlCol="0" anchor="t"/>
+          <a:lstStyle/>
+          <a:p>
+            <a:pPr marL="0" indent="0" algn="l">
+              <a:spcAft>
+                <a:spcPts val="0"/>
+              </a:spcAft>
+              <a:buNone/>
+            </a:pPr>
+            <a:r>
+              <a:rPr lang="en-US" sz="1200" b="1" kern="0" spc="150">
+                <a:solidFill>
+                  <a:srgbClr val="F7E23B"/>
+                </a:solidFill>
+                <a:latin typeface="Calibri" pitchFamily="34" charset="0"/>
+                <a:ea typeface="Calibri" pitchFamily="34" charset="-122"/>
+                <a:cs typeface="Calibri" pitchFamily="34" charset="-120"/>
+              </a:rPr>
+              <a:t>WHAT WE WATCHED</a:t>
+            </a:r>
+            <a:endParaRPr lang="en-US" sz="1200" b="1" kern="0" spc="150" dirty="0">
+              <a:solidFill>
+                <a:srgbClr val="F7E23B"/>
+              </a:solidFill>
+              <a:latin typeface="Calibri" pitchFamily="34" charset="0"/>
+              <a:ea typeface="Calibri" pitchFamily="34" charset="-122"/>
+              <a:cs typeface="Calibri" pitchFamily="34" charset="-120"/>
+            </a:endParaRPr>
+          </a:p>
+        </p:txBody>
+      </p:sp>
+      <p:sp>
+        <p:nvSpPr>
+          <p:cNvPr id="33" name="Fit text 2"/>
+          <p:cNvSpPr txBox="1"/>
+          <p:nvPr/>
+        </p:nvSpPr>
+        <p:spPr>
+          <a:xfrm>
+            <a:off x="4617720" y="4526280"/>
+            <a:ext cx="2926080" cy="822960"/>
+          </a:xfrm>
+          <a:prstGeom prst="rect">
+            <a:avLst/>
+          </a:prstGeom>
+          <a:noFill/>
+          <a:ln/>
+        </p:spPr>
+        <p:txBody>
+          <a:bodyPr wrap="square" lIns="0" tIns="0" rIns="0" bIns="0" rtlCol="0" anchor="t"/>
+          <a:lstStyle/>
+          <a:p>
+            <a:pPr marL="0" indent="0" algn="l">
+              <a:spcAft>
+                <a:spcPts val="0"/>
+              </a:spcAft>
+              <a:buNone/>
+            </a:pPr>
+            <a:r>
+              <a:rPr lang="en-US" sz="1500" kern="0">
+                <a:solidFill>
+                  <a:srgbClr val="F2F5FA"/>
+                </a:solidFill>
+                <a:latin typeface="Calibri" pitchFamily="34" charset="0"/>
+                <a:ea typeface="Calibri" pitchFamily="34" charset="-122"/>
+                <a:cs typeface="Calibri" pitchFamily="34" charset="-120"/>
+              </a:rPr>
+              <a:t>AI code can look right and be wrong. Known-answer tests and an independent evaluator caught it.</a:t>
+            </a:r>
+            <a:endParaRPr lang="en-US" sz="1500" kern="0" dirty="0">
+              <a:solidFill>
+                <a:srgbClr val="F2F5FA"/>
+              </a:solidFill>
+              <a:latin typeface="Calibri" pitchFamily="34" charset="0"/>
+              <a:ea typeface="Calibri" pitchFamily="34" charset="-122"/>
+              <a:cs typeface="Calibri" pitchFamily="34" charset="-120"/>
+            </a:endParaRPr>
+          </a:p>
+        </p:txBody>
+      </p:sp>
+      <p:sp>
+        <p:nvSpPr>
+          <p:cNvPr id="34" name="Fit card 3"/>
+          <p:cNvSpPr/>
+          <p:nvPr/>
+        </p:nvSpPr>
+        <p:spPr>
+          <a:xfrm>
+            <a:off x="8229600" y="4069080"/>
+            <a:ext cx="3383280" cy="1325880"/>
+          </a:xfrm>
+          <a:prstGeom prst="roundRect">
+            <a:avLst>
+              <a:gd name="adj" fmla="val 4500"/>
+            </a:avLst>
+          </a:prstGeom>
+          <a:solidFill>
+            <a:srgbClr val="16294A"/>
+          </a:solidFill>
+          <a:ln w="12700">
+            <a:solidFill>
+              <a:srgbClr val="2B4470"/>
+            </a:solidFill>
+            <a:prstDash val="solid"/>
+          </a:ln>
+          <a:effectLst>
+            <a:outerShdw blurRad="152400" dist="38100" dir="5400000" algn="bl" rotWithShape="0">
+              <a:srgbClr val="000000">
+                <a:alpha val="35000"/>
+              </a:srgbClr>
+            </a:outerShdw>
+          </a:effectLst>
+        </p:spPr>
+        <p:txBody>
+          <a:bodyPr/>
+          <a:lstStyle/>
+          <a:p>
+            <a:endParaRPr lang="en-GB"/>
+          </a:p>
+        </p:txBody>
+      </p:sp>
+      <p:sp>
+        <p:nvSpPr>
+          <p:cNvPr id="35" name="Fit label 3"/>
+          <p:cNvSpPr txBox="1"/>
+          <p:nvPr/>
+        </p:nvSpPr>
+        <p:spPr>
+          <a:xfrm>
+            <a:off x="8458200" y="4206240"/>
+            <a:ext cx="2926080" cy="274320"/>
+          </a:xfrm>
+          <a:prstGeom prst="rect">
+            <a:avLst/>
+          </a:prstGeom>
+          <a:noFill/>
+          <a:ln/>
+        </p:spPr>
+        <p:txBody>
+          <a:bodyPr wrap="square" lIns="0" tIns="0" rIns="0" bIns="0" rtlCol="0" anchor="t"/>
+          <a:lstStyle/>
+          <a:p>
+            <a:pPr marL="0" indent="0" algn="l">
+              <a:spcAft>
+                <a:spcPts val="0"/>
+              </a:spcAft>
+              <a:buNone/>
+            </a:pPr>
+            <a:r>
+              <a:rPr lang="en-US" sz="1200" b="1" kern="0" spc="150">
+                <a:solidFill>
+                  <a:srgbClr val="F7E23B"/>
+                </a:solidFill>
+                <a:latin typeface="Calibri" pitchFamily="34" charset="0"/>
+                <a:ea typeface="Calibri" pitchFamily="34" charset="-122"/>
+                <a:cs typeface="Calibri" pitchFamily="34" charset="-120"/>
+              </a:rPr>
+              <a:t>HUMANS IN THE LOOP</a:t>
+            </a:r>
+            <a:endParaRPr lang="en-US" sz="1200" b="1" kern="0" spc="150" dirty="0">
+              <a:solidFill>
+                <a:srgbClr val="F7E23B"/>
+              </a:solidFill>
+              <a:latin typeface="Calibri" pitchFamily="34" charset="0"/>
+              <a:ea typeface="Calibri" pitchFamily="34" charset="-122"/>
+              <a:cs typeface="Calibri" pitchFamily="34" charset="-120"/>
+            </a:endParaRPr>
+          </a:p>
+        </p:txBody>
+      </p:sp>
+      <p:sp>
+        <p:nvSpPr>
+          <p:cNvPr id="36" name="Fit text 3"/>
+          <p:cNvSpPr txBox="1"/>
+          <p:nvPr/>
+        </p:nvSpPr>
+        <p:spPr>
+          <a:xfrm>
+            <a:off x="8458200" y="4526280"/>
+            <a:ext cx="2926080" cy="822960"/>
+          </a:xfrm>
+          <a:prstGeom prst="rect">
+            <a:avLst/>
+          </a:prstGeom>
+          <a:noFill/>
+          <a:ln/>
+        </p:spPr>
+        <p:txBody>
+          <a:bodyPr wrap="square" lIns="0" tIns="0" rIns="0" bIns="0" rtlCol="0" anchor="t"/>
+          <a:lstStyle/>
+          <a:p>
+            <a:pPr marL="0" indent="0" algn="l">
+              <a:spcAft>
+                <a:spcPts val="0"/>
+              </a:spcAft>
+              <a:buNone/>
+            </a:pPr>
+            <a:r>
+              <a:rPr lang="en-US" sz="1500" kern="0">
+                <a:solidFill>
+                  <a:srgbClr val="F2F5FA"/>
+                </a:solidFill>
+                <a:latin typeface="Calibri" pitchFamily="34" charset="0"/>
+                <a:ea typeface="Calibri" pitchFamily="34" charset="-122"/>
+                <a:cs typeface="Calibri" pitchFamily="34" charset="-120"/>
+              </a:rPr>
+              <a:t>AI-assisted first review, re-checked by members. Audits confirmed 99 of 102 decisions.</a:t>
+            </a:r>
+            <a:endParaRPr lang="en-US" sz="1500" kern="0" dirty="0">
+              <a:solidFill>
+                <a:srgbClr val="F2F5FA"/>
+              </a:solidFill>
+              <a:latin typeface="Calibri" pitchFamily="34" charset="0"/>
+              <a:ea typeface="Calibri" pitchFamily="34" charset="-122"/>
+              <a:cs typeface="Calibri" pitchFamily="34" charset="-120"/>
+            </a:endParaRPr>
+          </a:p>
+        </p:txBody>
+      </p:sp>
+      <p:sp>
+        <p:nvSpPr>
+          <p:cNvPr id="37" name="Caveat"/>
+          <p:cNvSpPr txBox="1"/>
+          <p:nvPr/>
+        </p:nvSpPr>
+        <p:spPr>
+          <a:xfrm>
+            <a:off x="548640" y="5532120"/>
+            <a:ext cx="11064240" cy="320040"/>
+          </a:xfrm>
+          <a:prstGeom prst="rect">
+            <a:avLst/>
+          </a:prstGeom>
+          <a:noFill/>
+          <a:ln/>
+        </p:spPr>
+        <p:txBody>
+          <a:bodyPr wrap="square" lIns="0" tIns="0" rIns="0" bIns="0" rtlCol="0" anchor="t"/>
+          <a:lstStyle/>
+          <a:p>
+            <a:pPr marL="0" indent="0" algn="l">
+              <a:spcAft>
+                <a:spcPts val="0"/>
+              </a:spcAft>
+              <a:buNone/>
+            </a:pPr>
+            <a:r>
+              <a:rPr lang="en-US" sz="1500" i="1" kern="0">
+                <a:solidFill>
+                  <a:srgbClr val="9FB2CC"/>
+                </a:solidFill>
+                <a:latin typeface="Calibri" pitchFamily="34" charset="0"/>
+                <a:ea typeface="Calibri" pitchFamily="34" charset="-122"/>
+                <a:cs typeface="Calibri" pitchFamily="34" charset="-120"/>
+              </a:rPr>
+              <a:t>Every component can be explained, rerun and defended by the group; all AI use is listed in the report's AI disclosure.</a:t>
+            </a:r>
+            <a:endParaRPr lang="en-US" sz="1500" i="1" kern="0" dirty="0">
+              <a:solidFill>
+                <a:srgbClr val="9FB2CC"/>
+              </a:solidFill>
+              <a:latin typeface="Calibri" pitchFamily="34" charset="0"/>
+              <a:ea typeface="Calibri" pitchFamily="34" charset="-122"/>
+              <a:cs typeface="Calibri" pitchFamily="34" charset="-120"/>
+            </a:endParaRPr>
+          </a:p>
+        </p:txBody>
+      </p:sp>
+      <p:sp>
+        <p:nvSpPr>
+          <p:cNvPr id="3" name="Slide Number Placeholder 0"/>
+          <p:cNvSpPr>
+            <a:spLocks noGrp="1"/>
+          </p:cNvSpPr>
+          <p:nvPr>
+            <p:ph type="sldNum" sz="quarter" idx="4294967295"/>
+          </p:nvPr>
+        </p:nvSpPr>
+        <p:spPr>
+          <a:xfrm>
+            <a:off x="11155680" y="6400800"/>
+            <a:ext cx="548640" cy="274320"/>
+          </a:xfrm>
+          <a:prstGeom prst="rect">
+            <a:avLst/>
+          </a:prstGeom>
+          <a:extLst>
+            <a:ext uri="{C572A759-6A51-4108-AA02-DFA0A04FC94B}">
+              <ma14:wrappingTextBoxFlag xmlns:ma14="http://schemas.microsoft.com/office/mac/drawingml/2011/main" xmlns="" val="0"/>
+            </a:ext>
+          </a:extLst>
+        </p:spPr>
+        <p:txBody>
+          <a:bodyPr/>
+          <a:lstStyle>
+            <a:lvl1pPr>
+              <a:defRPr sz="1000">
+                <a:solidFill>
+                  <a:srgbClr val="9FB2CC"/>
+                </a:solidFill>
+                <a:latin typeface="Calibri"/>
+                <a:ea typeface="Calibri"/>
+                <a:cs typeface="Calibri"/>
+              </a:defRPr>
+            </a:lvl1pPr>
+          </a:lstStyle>
+          <a:p>
+            <a:pPr algn="l"/>
+            <a:fld id="{F7021451-1387-4CA6-816F-3879F97B5CBC}" type="slidenum">
+              <a:rPr lang="en-US" b="0"/>
+              <a:t>25</a:t>
+            </a:fld>
+            <a:endParaRPr lang="en-US"/>
+          </a:p>
+        </p:txBody>
+      </p:sp>
+    </p:spTree>
+    <p:extLst>
+      <p:ext uri="{BB962C8B-B14F-4D97-AF65-F5344CB8AC3E}">
+        <p14:creationId xmlns:p14="http://schemas.microsoft.com/office/powerpoint/2010/main" val="941743980"/>
+      </p:ext>
+    </p:extLst>
+  </p:cSld>
+  <p:clrMapOvr>
+    <a:masterClrMapping/>
+  </p:clrMapOvr>
+</p:sld>
+</file>
+
+<file path=ppt/slides/slide26.xml><?xml version="1.0" encoding="utf-8"?>
+<p:sld xmlns:a="http://schemas.openxmlformats.org/drawingml/2006/main" xmlns:r="http://schemas.openxmlformats.org/officeDocument/2006/relationships" xmlns:p="http://schemas.openxmlformats.org/presentationml/2006/main">
   <p:cSld name="Slide 23">
     <p:spTree>
       <p:nvGrpSpPr>
@@ -23227,7 +25860,7 @@
 </p:sld>
 </file>
 
-<file path=ppt/slides/slide25.xml><?xml version="1.0" encoding="utf-8"?>
+<file path=ppt/slides/slide27.xml><?xml version="1.0" encoding="utf-8"?>
 <p:sld xmlns:a="http://schemas.openxmlformats.org/drawingml/2006/main" xmlns:r="http://schemas.openxmlformats.org/officeDocument/2006/relationships" xmlns:p="http://schemas.openxmlformats.org/presentationml/2006/main">
   <p:cSld name="Slide 24">
     <p:spTree>
@@ -25098,7 +27731,7 @@
             <a:pPr algn="l"/>
             <a:fld id="{F7021451-1387-4CA6-816F-3879F97B5CBC}" type="slidenum">
               <a:rPr lang="en-US" b="0"/>
-              <a:t>26</a:t>
+              <a:t>27</a:t>
             </a:fld>
             <a:endParaRPr lang="en-US"/>
           </a:p>
@@ -25112,7 +27745,7 @@
 </p:sld>
 </file>
 
-<file path=ppt/slides/slide26.xml><?xml version="1.0" encoding="utf-8"?>
+<file path=ppt/slides/slide28.xml><?xml version="1.0" encoding="utf-8"?>
 <p:sld xmlns:a="http://schemas.openxmlformats.org/drawingml/2006/main" xmlns:r="http://schemas.openxmlformats.org/officeDocument/2006/relationships" xmlns:p="http://schemas.openxmlformats.org/presentationml/2006/main">
   <p:cSld name="Slide 25">
     <p:spTree>
@@ -27262,7 +29895,7 @@
             <a:pPr algn="l"/>
             <a:fld id="{F7021451-1387-4CA6-816F-3879F97B5CBC}" type="slidenum">
               <a:rPr lang="en-US" b="0"/>
-              <a:t>27</a:t>
+              <a:t>28</a:t>
             </a:fld>
             <a:endParaRPr lang="en-US"/>
           </a:p>
@@ -27276,7 +29909,7 @@
 </p:sld>
 </file>
 
-<file path=ppt/slides/slide27.xml><?xml version="1.0" encoding="utf-8"?>
+<file path=ppt/slides/slide29.xml><?xml version="1.0" encoding="utf-8"?>
 <p:sld xmlns:a="http://schemas.openxmlformats.org/drawingml/2006/main" xmlns:r="http://schemas.openxmlformats.org/officeDocument/2006/relationships" xmlns:p="http://schemas.openxmlformats.org/presentationml/2006/main">
   <p:cSld name="Slide 26">
     <p:spTree>
@@ -27473,1792 +30106,7 @@
             <a:pPr algn="l"/>
             <a:fld id="{F7021451-1387-4CA6-816F-3879F97B5CBC}" type="slidenum">
               <a:rPr lang="en-US" b="0"/>
-              <a:t>28</a:t>
-            </a:fld>
-            <a:endParaRPr lang="en-US"/>
-          </a:p>
-        </p:txBody>
-      </p:sp>
-    </p:spTree>
-  </p:cSld>
-  <p:clrMapOvr>
-    <a:masterClrMapping/>
-  </p:clrMapOvr>
-</p:sld>
-</file>
-
-<file path=ppt/slides/slide28.xml><?xml version="1.0" encoding="utf-8"?>
-<p:sld xmlns:a="http://schemas.openxmlformats.org/drawingml/2006/main" xmlns:r="http://schemas.openxmlformats.org/officeDocument/2006/relationships" xmlns:p="http://schemas.openxmlformats.org/presentationml/2006/main">
-  <p:cSld name="Slide 27">
-    <p:spTree>
-      <p:nvGrpSpPr>
-        <p:cNvPr id="1" name=""/>
-        <p:cNvGrpSpPr/>
-        <p:nvPr/>
-      </p:nvGrpSpPr>
-      <p:grpSpPr>
-        <a:xfrm>
-          <a:off x="0" y="0"/>
-          <a:ext cx="0" cy="0"/>
-          <a:chOff x="0" y="0"/>
-          <a:chExt cx="0" cy="0"/>
-        </a:xfrm>
-      </p:grpSpPr>
-      <p:sp>
-        <p:nvSpPr>
-          <p:cNvPr id="2" name="Text 0"/>
-          <p:cNvSpPr>
-            <a:spLocks noGrp="1"/>
-          </p:cNvSpPr>
-          <p:nvPr>
-            <p:ph type="title" idx="100" hasCustomPrompt="1"/>
-          </p:nvPr>
-        </p:nvSpPr>
-        <p:spPr>
-          <a:xfrm>
-            <a:off x="548640" y="365760"/>
-            <a:ext cx="11064240" cy="868680"/>
-          </a:xfrm>
-          <a:prstGeom prst="rect">
-            <a:avLst/>
-          </a:prstGeom>
-          <a:noFill/>
-          <a:ln/>
-        </p:spPr>
-        <p:txBody>
-          <a:bodyPr wrap="square" lIns="0" tIns="0" rIns="0" bIns="0" rtlCol="0" anchor="ctr"/>
-          <a:lstStyle/>
-          <a:p>
-            <a:pPr marL="0" indent="0" algn="l">
-              <a:buNone/>
-            </a:pPr>
-            <a:r>
-              <a:rPr lang="en-US" sz="3400" b="1" dirty="0">
-                <a:solidFill>
-                  <a:srgbClr val="F2F5FA"/>
-                </a:solidFill>
-                <a:latin typeface="Cambria" pitchFamily="34" charset="0"/>
-                <a:ea typeface="Cambria" pitchFamily="34" charset="-122"/>
-                <a:cs typeface="Cambria" pitchFamily="34" charset="-120"/>
-              </a:rPr>
-              <a:t>Appendix D: Sources and reproducibility</a:t>
-            </a:r>
-            <a:endParaRPr lang="en-US" sz="3400" dirty="0"/>
-          </a:p>
-        </p:txBody>
-      </p:sp>
-      <p:sp>
-        <p:nvSpPr>
-          <p:cNvPr id="3" name="Card"/>
-          <p:cNvSpPr/>
-          <p:nvPr/>
-        </p:nvSpPr>
-        <p:spPr>
-          <a:xfrm>
-            <a:off x="548640" y="1463040"/>
-            <a:ext cx="5440680" cy="2286000"/>
-          </a:xfrm>
-          <a:prstGeom prst="roundRect">
-            <a:avLst>
-              <a:gd name="adj" fmla="val 4800"/>
-            </a:avLst>
-          </a:prstGeom>
-          <a:solidFill>
-            <a:srgbClr val="16294A"/>
-          </a:solidFill>
-          <a:ln w="12700">
-            <a:solidFill>
-              <a:srgbClr val="8FC1FF"/>
-            </a:solidFill>
-            <a:prstDash val="solid"/>
-          </a:ln>
-          <a:effectLst>
-            <a:outerShdw blurRad="152400" dist="38100" dir="5400000" algn="bl" rotWithShape="0">
-              <a:srgbClr val="000000">
-                <a:alpha val="35000"/>
-              </a:srgbClr>
-            </a:outerShdw>
-          </a:effectLst>
-        </p:spPr>
-        <p:txBody>
-          <a:bodyPr/>
-          <a:lstStyle/>
-          <a:p>
-            <a:endParaRPr lang="en-GB"/>
-          </a:p>
-        </p:txBody>
-      </p:sp>
-      <p:sp>
-        <p:nvSpPr>
-          <p:cNvPr id="4" name="Text 2"/>
-          <p:cNvSpPr txBox="1"/>
-          <p:nvPr/>
-        </p:nvSpPr>
-        <p:spPr>
-          <a:xfrm>
-            <a:off x="822960" y="1645920"/>
-            <a:ext cx="4846320" cy="365760"/>
-          </a:xfrm>
-          <a:prstGeom prst="rect">
-            <a:avLst/>
-          </a:prstGeom>
-          <a:noFill/>
-          <a:ln/>
-        </p:spPr>
-        <p:txBody>
-          <a:bodyPr wrap="square" lIns="0" tIns="0" rIns="0" bIns="0" rtlCol="0" anchor="t"/>
-          <a:lstStyle/>
-          <a:p>
-            <a:pPr marL="0" indent="0">
-              <a:buNone/>
-            </a:pPr>
-            <a:r>
-              <a:rPr lang="en-US" sz="1400" b="1" kern="0" spc="200" dirty="0">
-                <a:solidFill>
-                  <a:srgbClr val="8FC1FF"/>
-                </a:solidFill>
-                <a:latin typeface="Calibri" pitchFamily="34" charset="0"/>
-                <a:ea typeface="Calibri" pitchFamily="34" charset="-122"/>
-                <a:cs typeface="Calibri" pitchFamily="34" charset="-120"/>
-              </a:rPr>
-              <a:t>RESEARCH EVIDENCE</a:t>
-            </a:r>
-            <a:endParaRPr lang="en-US" sz="1400" dirty="0"/>
-          </a:p>
-        </p:txBody>
-      </p:sp>
-      <p:sp>
-        <p:nvSpPr>
-          <p:cNvPr id="5" name="Text 3"/>
-          <p:cNvSpPr txBox="1"/>
-          <p:nvPr/>
-        </p:nvSpPr>
-        <p:spPr>
-          <a:xfrm>
-            <a:off x="822960" y="2194560"/>
-            <a:ext cx="4846320" cy="1371600"/>
-          </a:xfrm>
-          <a:prstGeom prst="rect">
-            <a:avLst/>
-          </a:prstGeom>
-          <a:noFill/>
-          <a:ln/>
-        </p:spPr>
-        <p:txBody>
-          <a:bodyPr wrap="square" lIns="0" tIns="0" rIns="0" bIns="0" rtlCol="0" anchor="t"/>
-          <a:lstStyle/>
-          <a:p>
-            <a:pPr marL="0" indent="0">
-              <a:buNone/>
-            </a:pPr>
-            <a:r>
-              <a:rPr lang="en-US" sz="1700" dirty="0">
-                <a:solidFill>
-                  <a:srgbClr val="F2F5FA"/>
-                </a:solidFill>
-                <a:latin typeface="Calibri" pitchFamily="34" charset="0"/>
-                <a:ea typeface="Calibri" pitchFamily="34" charset="-122"/>
-                <a:cs typeface="Calibri" pitchFamily="34" charset="-120"/>
-              </a:rPr>
-              <a:t>COMP301 The Skeptics Final Report. Tables 1, 3 to 5 and 7 to 12; Figures 1 to 6; Chapters 6 to 11.</a:t>
-            </a:r>
-            <a:endParaRPr lang="en-US" sz="1700" dirty="0"/>
-          </a:p>
-        </p:txBody>
-      </p:sp>
-      <p:sp>
-        <p:nvSpPr>
-          <p:cNvPr id="6" name="Card"/>
-          <p:cNvSpPr/>
-          <p:nvPr/>
-        </p:nvSpPr>
-        <p:spPr>
-          <a:xfrm>
-            <a:off x="6172200" y="1463040"/>
-            <a:ext cx="5440680" cy="2286000"/>
-          </a:xfrm>
-          <a:prstGeom prst="roundRect">
-            <a:avLst>
-              <a:gd name="adj" fmla="val 4800"/>
-            </a:avLst>
-          </a:prstGeom>
-          <a:solidFill>
-            <a:srgbClr val="16294A"/>
-          </a:solidFill>
-          <a:ln w="12700">
-            <a:solidFill>
-              <a:srgbClr val="3D95E8"/>
-            </a:solidFill>
-            <a:prstDash val="solid"/>
-          </a:ln>
-          <a:effectLst>
-            <a:outerShdw blurRad="152400" dist="38100" dir="5400000" algn="bl" rotWithShape="0">
-              <a:srgbClr val="000000">
-                <a:alpha val="35000"/>
-              </a:srgbClr>
-            </a:outerShdw>
-          </a:effectLst>
-        </p:spPr>
-        <p:txBody>
-          <a:bodyPr/>
-          <a:lstStyle/>
-          <a:p>
-            <a:endParaRPr lang="en-GB"/>
-          </a:p>
-        </p:txBody>
-      </p:sp>
-      <p:sp>
-        <p:nvSpPr>
-          <p:cNvPr id="7" name="Text 5"/>
-          <p:cNvSpPr txBox="1"/>
-          <p:nvPr/>
-        </p:nvSpPr>
-        <p:spPr>
-          <a:xfrm>
-            <a:off x="6446520" y="1645920"/>
-            <a:ext cx="4846320" cy="365760"/>
-          </a:xfrm>
-          <a:prstGeom prst="rect">
-            <a:avLst/>
-          </a:prstGeom>
-          <a:noFill/>
-          <a:ln/>
-        </p:spPr>
-        <p:txBody>
-          <a:bodyPr wrap="square" lIns="0" tIns="0" rIns="0" bIns="0" rtlCol="0" anchor="t"/>
-          <a:lstStyle/>
-          <a:p>
-            <a:pPr marL="0" indent="0">
-              <a:buNone/>
-            </a:pPr>
-            <a:r>
-              <a:rPr lang="en-US" sz="1400" b="1" kern="0" spc="200" dirty="0">
-                <a:solidFill>
-                  <a:srgbClr val="3D95E8"/>
-                </a:solidFill>
-                <a:latin typeface="Calibri" pitchFamily="34" charset="0"/>
-                <a:ea typeface="Calibri" pitchFamily="34" charset="-122"/>
-                <a:cs typeface="Calibri" pitchFamily="34" charset="-120"/>
-              </a:rPr>
-              <a:t>PRESENTER NARRATIVE</a:t>
-            </a:r>
-            <a:endParaRPr lang="en-US" sz="1400" dirty="0"/>
-          </a:p>
-        </p:txBody>
-      </p:sp>
-      <p:sp>
-        <p:nvSpPr>
-          <p:cNvPr id="8" name="Text 6"/>
-          <p:cNvSpPr txBox="1"/>
-          <p:nvPr/>
-        </p:nvSpPr>
-        <p:spPr>
-          <a:xfrm>
-            <a:off x="6446520" y="2194560"/>
-            <a:ext cx="4846320" cy="1371600"/>
-          </a:xfrm>
-          <a:prstGeom prst="rect">
-            <a:avLst/>
-          </a:prstGeom>
-          <a:noFill/>
-          <a:ln/>
-        </p:spPr>
-        <p:txBody>
-          <a:bodyPr wrap="square" lIns="0" tIns="0" rIns="0" bIns="0" rtlCol="0" anchor="t"/>
-          <a:lstStyle/>
-          <a:p>
-            <a:pPr marL="0" indent="0">
-              <a:buNone/>
-            </a:pPr>
-            <a:r>
-              <a:rPr lang="en-US" sz="1700" dirty="0">
-                <a:solidFill>
-                  <a:srgbClr val="F2F5FA"/>
-                </a:solidFill>
-                <a:latin typeface="Calibri" pitchFamily="34" charset="0"/>
-                <a:ea typeface="Calibri" pitchFamily="34" charset="-122"/>
-                <a:cs typeface="Calibri" pitchFamily="34" charset="-120"/>
-              </a:rPr>
-              <a:t>The Skeptics Final Presentation Script. Five presenter sections, about 15 to 16 minutes.</a:t>
-            </a:r>
-            <a:endParaRPr lang="en-US" sz="1700" dirty="0"/>
-          </a:p>
-        </p:txBody>
-      </p:sp>
-      <p:sp>
-        <p:nvSpPr>
-          <p:cNvPr id="9" name="Text 7"/>
-          <p:cNvSpPr txBox="1"/>
-          <p:nvPr/>
-        </p:nvSpPr>
-        <p:spPr>
-          <a:xfrm>
-            <a:off x="548640" y="4114800"/>
-            <a:ext cx="3566160" cy="640080"/>
-          </a:xfrm>
-          <a:prstGeom prst="rect">
-            <a:avLst/>
-          </a:prstGeom>
-          <a:noFill/>
-          <a:ln/>
-        </p:spPr>
-        <p:txBody>
-          <a:bodyPr wrap="square" lIns="0" tIns="0" rIns="0" bIns="0" rtlCol="0" anchor="t"/>
-          <a:lstStyle/>
-          <a:p>
-            <a:pPr marL="0" indent="0">
-              <a:buNone/>
-            </a:pPr>
-            <a:r>
-              <a:rPr lang="en-US" sz="3000" b="1" dirty="0">
-                <a:solidFill>
-                  <a:srgbClr val="F7E23B"/>
-                </a:solidFill>
-                <a:latin typeface="Cambria" pitchFamily="34" charset="0"/>
-                <a:ea typeface="Cambria" pitchFamily="34" charset="-122"/>
-                <a:cs typeface="Cambria" pitchFamily="34" charset="-120"/>
-              </a:rPr>
-              <a:t>21 Sep 2026</a:t>
-            </a:r>
-            <a:endParaRPr lang="en-US" sz="3000" dirty="0"/>
-          </a:p>
-        </p:txBody>
-      </p:sp>
-      <p:sp>
-        <p:nvSpPr>
-          <p:cNvPr id="10" name="Text 8"/>
-          <p:cNvSpPr txBox="1"/>
-          <p:nvPr/>
-        </p:nvSpPr>
-        <p:spPr>
-          <a:xfrm>
-            <a:off x="548640" y="4754880"/>
-            <a:ext cx="3566160" cy="457200"/>
-          </a:xfrm>
-          <a:prstGeom prst="rect">
-            <a:avLst/>
-          </a:prstGeom>
-          <a:noFill/>
-          <a:ln/>
-        </p:spPr>
-        <p:txBody>
-          <a:bodyPr wrap="square" lIns="0" tIns="0" rIns="0" bIns="0" rtlCol="0" anchor="t"/>
-          <a:lstStyle/>
-          <a:p>
-            <a:pPr marL="0" indent="0">
-              <a:buNone/>
-            </a:pPr>
-            <a:r>
-              <a:rPr lang="en-US" sz="1600" dirty="0">
-                <a:solidFill>
-                  <a:srgbClr val="9FB2CC"/>
-                </a:solidFill>
-                <a:latin typeface="Calibri" pitchFamily="34" charset="0"/>
-                <a:ea typeface="Calibri" pitchFamily="34" charset="-122"/>
-                <a:cs typeface="Calibri" pitchFamily="34" charset="-120"/>
-              </a:rPr>
-              <a:t>Specifications frozen</a:t>
-            </a:r>
-            <a:endParaRPr lang="en-US" sz="1600" dirty="0"/>
-          </a:p>
-        </p:txBody>
-      </p:sp>
-      <p:sp>
-        <p:nvSpPr>
-          <p:cNvPr id="11" name="Text 9"/>
-          <p:cNvSpPr txBox="1"/>
-          <p:nvPr/>
-        </p:nvSpPr>
-        <p:spPr>
-          <a:xfrm>
-            <a:off x="4297680" y="4114800"/>
-            <a:ext cx="3566160" cy="640080"/>
-          </a:xfrm>
-          <a:prstGeom prst="rect">
-            <a:avLst/>
-          </a:prstGeom>
-          <a:noFill/>
-          <a:ln/>
-        </p:spPr>
-        <p:txBody>
-          <a:bodyPr wrap="square" lIns="0" tIns="0" rIns="0" bIns="0" rtlCol="0" anchor="t"/>
-          <a:lstStyle/>
-          <a:p>
-            <a:pPr marL="0" indent="0">
-              <a:buNone/>
-            </a:pPr>
-            <a:r>
-              <a:rPr lang="en-US" sz="3000" b="1" dirty="0">
-                <a:solidFill>
-                  <a:srgbClr val="F7E23B"/>
-                </a:solidFill>
-                <a:latin typeface="Cambria" pitchFamily="34" charset="0"/>
-                <a:ea typeface="Cambria" pitchFamily="34" charset="-122"/>
-                <a:cs typeface="Cambria" pitchFamily="34" charset="-120"/>
-              </a:rPr>
-              <a:t>27 Sep 2026</a:t>
-            </a:r>
-            <a:endParaRPr lang="en-US" sz="3000" dirty="0"/>
-          </a:p>
-        </p:txBody>
-      </p:sp>
-      <p:sp>
-        <p:nvSpPr>
-          <p:cNvPr id="12" name="Text 10"/>
-          <p:cNvSpPr txBox="1"/>
-          <p:nvPr/>
-        </p:nvSpPr>
-        <p:spPr>
-          <a:xfrm>
-            <a:off x="4297680" y="4754880"/>
-            <a:ext cx="3566160" cy="457200"/>
-          </a:xfrm>
-          <a:prstGeom prst="rect">
-            <a:avLst/>
-          </a:prstGeom>
-          <a:noFill/>
-          <a:ln/>
-        </p:spPr>
-        <p:txBody>
-          <a:bodyPr wrap="square" lIns="0" tIns="0" rIns="0" bIns="0" rtlCol="0" anchor="t"/>
-          <a:lstStyle/>
-          <a:p>
-            <a:pPr marL="0" indent="0">
-              <a:buNone/>
-            </a:pPr>
-            <a:r>
-              <a:rPr lang="en-US" sz="1600" dirty="0">
-                <a:solidFill>
-                  <a:srgbClr val="9FB2CC"/>
-                </a:solidFill>
-                <a:latin typeface="Calibri" pitchFamily="34" charset="0"/>
-                <a:ea typeface="Calibri" pitchFamily="34" charset="-122"/>
-                <a:cs typeface="Calibri" pitchFamily="34" charset="-120"/>
-              </a:rPr>
-              <a:t>Evaluation plan fixed</a:t>
-            </a:r>
-            <a:endParaRPr lang="en-US" sz="1600" dirty="0"/>
-          </a:p>
-        </p:txBody>
-      </p:sp>
-      <p:sp>
-        <p:nvSpPr>
-          <p:cNvPr id="13" name="Text 11"/>
-          <p:cNvSpPr txBox="1"/>
-          <p:nvPr/>
-        </p:nvSpPr>
-        <p:spPr>
-          <a:xfrm>
-            <a:off x="8046720" y="4114800"/>
-            <a:ext cx="3566160" cy="640080"/>
-          </a:xfrm>
-          <a:prstGeom prst="rect">
-            <a:avLst/>
-          </a:prstGeom>
-          <a:noFill/>
-          <a:ln/>
-        </p:spPr>
-        <p:txBody>
-          <a:bodyPr wrap="square" lIns="0" tIns="0" rIns="0" bIns="0" rtlCol="0" anchor="t"/>
-          <a:lstStyle/>
-          <a:p>
-            <a:pPr marL="0" indent="0">
-              <a:buNone/>
-            </a:pPr>
-            <a:r>
-              <a:rPr lang="en-US" sz="3000" b="1" dirty="0">
-                <a:solidFill>
-                  <a:srgbClr val="F7E23B"/>
-                </a:solidFill>
-                <a:latin typeface="Cambria" pitchFamily="34" charset="0"/>
-                <a:ea typeface="Cambria" pitchFamily="34" charset="-122"/>
-                <a:cs typeface="Cambria" pitchFamily="34" charset="-120"/>
-              </a:rPr>
-              <a:t>30 Sep to 3 Oct 2026</a:t>
-            </a:r>
-            <a:endParaRPr lang="en-US" sz="3000" dirty="0"/>
-          </a:p>
-        </p:txBody>
-      </p:sp>
-      <p:sp>
-        <p:nvSpPr>
-          <p:cNvPr id="14" name="Text 12"/>
-          <p:cNvSpPr txBox="1"/>
-          <p:nvPr/>
-        </p:nvSpPr>
-        <p:spPr>
-          <a:xfrm>
-            <a:off x="8046720" y="4754880"/>
-            <a:ext cx="3566160" cy="457200"/>
-          </a:xfrm>
-          <a:prstGeom prst="rect">
-            <a:avLst/>
-          </a:prstGeom>
-          <a:noFill/>
-          <a:ln/>
-        </p:spPr>
-        <p:txBody>
-          <a:bodyPr wrap="square" lIns="0" tIns="0" rIns="0" bIns="0" rtlCol="0" anchor="t"/>
-          <a:lstStyle/>
-          <a:p>
-            <a:pPr marL="0" indent="0">
-              <a:buNone/>
-            </a:pPr>
-            <a:r>
-              <a:rPr lang="en-US" sz="1600" dirty="0">
-                <a:solidFill>
-                  <a:srgbClr val="9FB2CC"/>
-                </a:solidFill>
-                <a:latin typeface="Calibri" pitchFamily="34" charset="0"/>
-                <a:ea typeface="Calibri" pitchFamily="34" charset="-122"/>
-                <a:cs typeface="Calibri" pitchFamily="34" charset="-120"/>
-              </a:rPr>
-              <a:t>Main runs</a:t>
-            </a:r>
-            <a:endParaRPr lang="en-US" sz="1600" dirty="0"/>
-          </a:p>
-        </p:txBody>
-      </p:sp>
-      <p:sp>
-        <p:nvSpPr>
-          <p:cNvPr id="25" name="Slide Number Placeholder 0"/>
-          <p:cNvSpPr>
-            <a:spLocks noGrp="1"/>
-          </p:cNvSpPr>
-          <p:nvPr>
-            <p:ph type="sldNum" sz="quarter" idx="4294967295"/>
-          </p:nvPr>
-        </p:nvSpPr>
-        <p:spPr>
-          <a:xfrm>
-            <a:off x="11155680" y="6400800"/>
-            <a:ext cx="548640" cy="274320"/>
-          </a:xfrm>
-          <a:prstGeom prst="rect">
-            <a:avLst/>
-          </a:prstGeom>
-          <a:extLst>
-            <a:ext uri="{C572A759-6A51-4108-AA02-DFA0A04FC94B}">
-              <ma14:wrappingTextBoxFlag xmlns="" xmlns:ma14="http://schemas.microsoft.com/office/mac/drawingml/2011/main" val="0"/>
-            </a:ext>
-          </a:extLst>
-        </p:spPr>
-        <p:txBody>
-          <a:bodyPr/>
-          <a:lstStyle>
-            <a:lvl1pPr>
-              <a:defRPr sz="1000">
-                <a:solidFill>
-                  <a:srgbClr val="9FB2CC"/>
-                </a:solidFill>
-                <a:latin typeface="Calibri"/>
-                <a:ea typeface="Calibri"/>
-                <a:cs typeface="Calibri"/>
-              </a:defRPr>
-            </a:lvl1pPr>
-          </a:lstStyle>
-          <a:p>
-            <a:pPr algn="l"/>
-            <a:fld id="{F7021451-1387-4CA6-816F-3879F97B5CBC}" type="slidenum">
-              <a:rPr lang="en-US" b="0"/>
               <a:t>29</a:t>
-            </a:fld>
-            <a:endParaRPr lang="en-US"/>
-          </a:p>
-        </p:txBody>
-      </p:sp>
-    </p:spTree>
-  </p:cSld>
-  <p:clrMapOvr>
-    <a:masterClrMapping/>
-  </p:clrMapOvr>
-</p:sld>
-</file>
-
-<file path=ppt/slides/slide29.xml><?xml version="1.0" encoding="utf-8"?>
-<p:sld xmlns:a="http://schemas.openxmlformats.org/drawingml/2006/main" xmlns:r="http://schemas.openxmlformats.org/officeDocument/2006/relationships" xmlns:p="http://schemas.openxmlformats.org/presentationml/2006/main">
-  <p:cSld name="Slide 22">
-    <p:spTree>
-      <p:nvGrpSpPr>
-        <p:cNvPr id="1" name=""/>
-        <p:cNvGrpSpPr/>
-        <p:nvPr/>
-      </p:nvGrpSpPr>
-      <p:grpSpPr>
-        <a:xfrm>
-          <a:off x="0" y="0"/>
-          <a:ext cx="0" cy="0"/>
-          <a:chOff x="0" y="0"/>
-          <a:chExt cx="0" cy="0"/>
-        </a:xfrm>
-      </p:grpSpPr>
-      <p:sp>
-        <p:nvSpPr>
-          <p:cNvPr id="2" name="Text 0"/>
-          <p:cNvSpPr>
-            <a:spLocks noGrp="1"/>
-          </p:cNvSpPr>
-          <p:nvPr>
-            <p:ph type="title" idx="100" hasCustomPrompt="1"/>
-          </p:nvPr>
-        </p:nvSpPr>
-        <p:spPr>
-          <a:xfrm>
-            <a:off x="548640" y="365760"/>
-            <a:ext cx="11064240" cy="868680"/>
-          </a:xfrm>
-          <a:prstGeom prst="rect">
-            <a:avLst/>
-          </a:prstGeom>
-          <a:noFill/>
-          <a:ln/>
-        </p:spPr>
-        <p:txBody>
-          <a:bodyPr wrap="square" lIns="0" tIns="0" rIns="0" bIns="0" rtlCol="0" anchor="ctr"/>
-          <a:lstStyle/>
-          <a:p>
-            <a:pPr marL="0" indent="0" algn="l">
-              <a:buNone/>
-            </a:pPr>
-            <a:r>
-              <a:rPr lang="en-US" sz="3400" b="1" dirty="0">
-                <a:solidFill>
-                  <a:srgbClr val="F2F5FA"/>
-                </a:solidFill>
-                <a:latin typeface="Cambria" pitchFamily="34" charset="0"/>
-                <a:ea typeface="Cambria" pitchFamily="34" charset="-122"/>
-                <a:cs typeface="Cambria" pitchFamily="34" charset="-120"/>
-              </a:rPr>
-              <a:t>Applying it in the real world</a:t>
-            </a:r>
-            <a:endParaRPr lang="en-US" sz="3400" dirty="0"/>
-          </a:p>
-        </p:txBody>
-      </p:sp>
-      <p:sp>
-        <p:nvSpPr>
-          <p:cNvPr id="11" name="Subtitle"/>
-          <p:cNvSpPr txBox="1"/>
-          <p:nvPr/>
-        </p:nvSpPr>
-        <p:spPr>
-          <a:xfrm>
-            <a:off x="548640" y="1234440"/>
-            <a:ext cx="11064240" cy="320040"/>
-          </a:xfrm>
-          <a:prstGeom prst="rect">
-            <a:avLst/>
-          </a:prstGeom>
-          <a:noFill/>
-          <a:ln/>
-        </p:spPr>
-        <p:txBody>
-          <a:bodyPr wrap="square" lIns="0" tIns="0" rIns="0" bIns="0" rtlCol="0" anchor="t"/>
-          <a:lstStyle/>
-          <a:p>
-            <a:pPr marL="0" indent="0" algn="l">
-              <a:spcAft>
-                <a:spcPts val="0"/>
-              </a:spcAft>
-              <a:buNone/>
-            </a:pPr>
-            <a:r>
-              <a:rPr lang="en-US" sz="1600" kern="0" dirty="0">
-                <a:solidFill>
-                  <a:srgbClr val="9FB2CC"/>
-                </a:solidFill>
-                <a:latin typeface="Calibri" pitchFamily="34" charset="0"/>
-                <a:ea typeface="Calibri" pitchFamily="34" charset="-122"/>
-                <a:cs typeface="Calibri" pitchFamily="34" charset="-120"/>
-              </a:rPr>
-              <a:t>Now imagine a company with a large codebase and its own internal APIs</a:t>
-            </a:r>
-          </a:p>
-        </p:txBody>
-      </p:sp>
-      <p:sp>
-        <p:nvSpPr>
-          <p:cNvPr id="12" name="Flow card 1"/>
-          <p:cNvSpPr/>
-          <p:nvPr/>
-        </p:nvSpPr>
-        <p:spPr>
-          <a:xfrm>
-            <a:off x="548640" y="1737360"/>
-            <a:ext cx="3383280" cy="2103120"/>
-          </a:xfrm>
-          <a:prstGeom prst="roundRect">
-            <a:avLst>
-              <a:gd name="adj" fmla="val 4500"/>
-            </a:avLst>
-          </a:prstGeom>
-          <a:solidFill>
-            <a:srgbClr val="16294A"/>
-          </a:solidFill>
-          <a:ln w="12700">
-            <a:solidFill>
-              <a:srgbClr val="2B4470"/>
-            </a:solidFill>
-            <a:prstDash val="solid"/>
-          </a:ln>
-          <a:effectLst>
-            <a:outerShdw blurRad="152400" dist="38100" dir="5400000" algn="bl" rotWithShape="0">
-              <a:srgbClr val="000000">
-                <a:alpha val="35000"/>
-              </a:srgbClr>
-            </a:outerShdw>
-          </a:effectLst>
-        </p:spPr>
-        <p:txBody>
-          <a:bodyPr/>
-          <a:lstStyle/>
-          <a:p>
-            <a:endParaRPr lang="en-GB"/>
-          </a:p>
-        </p:txBody>
-      </p:sp>
-      <p:sp>
-        <p:nvSpPr>
-          <p:cNvPr id="13" name="Flow label 1"/>
-          <p:cNvSpPr txBox="1"/>
-          <p:nvPr/>
-        </p:nvSpPr>
-        <p:spPr>
-          <a:xfrm>
-            <a:off x="777240" y="1920240"/>
-            <a:ext cx="2926080" cy="274320"/>
-          </a:xfrm>
-          <a:prstGeom prst="rect">
-            <a:avLst/>
-          </a:prstGeom>
-          <a:noFill/>
-          <a:ln/>
-        </p:spPr>
-        <p:txBody>
-          <a:bodyPr wrap="square" lIns="0" tIns="0" rIns="0" bIns="0" rtlCol="0" anchor="t"/>
-          <a:lstStyle/>
-          <a:p>
-            <a:pPr marL="0" indent="0" algn="l">
-              <a:spcAft>
-                <a:spcPts val="0"/>
-              </a:spcAft>
-              <a:buNone/>
-            </a:pPr>
-            <a:r>
-              <a:rPr lang="en-US" sz="1200" b="1" kern="0" spc="150" dirty="0">
-                <a:solidFill>
-                  <a:srgbClr val="8FC1FF"/>
-                </a:solidFill>
-                <a:latin typeface="Calibri" pitchFamily="34" charset="0"/>
-                <a:ea typeface="Calibri" pitchFamily="34" charset="-122"/>
-                <a:cs typeface="Calibri" pitchFamily="34" charset="-120"/>
-              </a:rPr>
-              <a:t>1   THE ASSISTANT WRITES</a:t>
-            </a:r>
-          </a:p>
-        </p:txBody>
-      </p:sp>
-      <p:sp>
-        <p:nvSpPr>
-          <p:cNvPr id="14" name="Flow card 2"/>
-          <p:cNvSpPr/>
-          <p:nvPr/>
-        </p:nvSpPr>
-        <p:spPr>
-          <a:xfrm>
-            <a:off x="4389120" y="1737360"/>
-            <a:ext cx="3383280" cy="2103120"/>
-          </a:xfrm>
-          <a:prstGeom prst="roundRect">
-            <a:avLst>
-              <a:gd name="adj" fmla="val 4500"/>
-            </a:avLst>
-          </a:prstGeom>
-          <a:solidFill>
-            <a:srgbClr val="16294A"/>
-          </a:solidFill>
-          <a:ln w="19050">
-            <a:solidFill>
-              <a:srgbClr val="8FC1FF"/>
-            </a:solidFill>
-            <a:prstDash val="solid"/>
-          </a:ln>
-          <a:effectLst>
-            <a:outerShdw blurRad="152400" dist="38100" dir="5400000" algn="bl" rotWithShape="0">
-              <a:srgbClr val="000000">
-                <a:alpha val="35000"/>
-              </a:srgbClr>
-            </a:outerShdw>
-          </a:effectLst>
-        </p:spPr>
-        <p:txBody>
-          <a:bodyPr/>
-          <a:lstStyle/>
-          <a:p>
-            <a:endParaRPr lang="en-GB"/>
-          </a:p>
-        </p:txBody>
-      </p:sp>
-      <p:sp>
-        <p:nvSpPr>
-          <p:cNvPr id="15" name="Flow label 2"/>
-          <p:cNvSpPr txBox="1"/>
-          <p:nvPr/>
-        </p:nvSpPr>
-        <p:spPr>
-          <a:xfrm>
-            <a:off x="4617720" y="1920240"/>
-            <a:ext cx="2926080" cy="274320"/>
-          </a:xfrm>
-          <a:prstGeom prst="rect">
-            <a:avLst/>
-          </a:prstGeom>
-          <a:noFill/>
-          <a:ln/>
-        </p:spPr>
-        <p:txBody>
-          <a:bodyPr wrap="square" lIns="0" tIns="0" rIns="0" bIns="0" rtlCol="0" anchor="t"/>
-          <a:lstStyle/>
-          <a:p>
-            <a:pPr marL="0" indent="0" algn="l">
-              <a:spcAft>
-                <a:spcPts val="0"/>
-              </a:spcAft>
-              <a:buNone/>
-            </a:pPr>
-            <a:r>
-              <a:rPr lang="en-US" sz="1200" b="1" kern="0" spc="150" dirty="0">
-                <a:solidFill>
-                  <a:srgbClr val="8FC1FF"/>
-                </a:solidFill>
-                <a:latin typeface="Calibri" pitchFamily="34" charset="0"/>
-                <a:ea typeface="Calibri" pitchFamily="34" charset="-122"/>
-                <a:cs typeface="Calibri" pitchFamily="34" charset="-120"/>
-              </a:rPr>
-              <a:t>2   THE CHECKER READS</a:t>
-            </a:r>
-          </a:p>
-        </p:txBody>
-      </p:sp>
-      <p:sp>
-        <p:nvSpPr>
-          <p:cNvPr id="16" name="Flow card 3"/>
-          <p:cNvSpPr/>
-          <p:nvPr/>
-        </p:nvSpPr>
-        <p:spPr>
-          <a:xfrm>
-            <a:off x="8229600" y="1737360"/>
-            <a:ext cx="3383280" cy="2103120"/>
-          </a:xfrm>
-          <a:prstGeom prst="roundRect">
-            <a:avLst>
-              <a:gd name="adj" fmla="val 4500"/>
-            </a:avLst>
-          </a:prstGeom>
-          <a:solidFill>
-            <a:srgbClr val="16294A"/>
-          </a:solidFill>
-          <a:ln w="12700">
-            <a:solidFill>
-              <a:srgbClr val="2B4470"/>
-            </a:solidFill>
-            <a:prstDash val="solid"/>
-          </a:ln>
-          <a:effectLst>
-            <a:outerShdw blurRad="152400" dist="38100" dir="5400000" algn="bl" rotWithShape="0">
-              <a:srgbClr val="000000">
-                <a:alpha val="35000"/>
-              </a:srgbClr>
-            </a:outerShdw>
-          </a:effectLst>
-        </p:spPr>
-        <p:txBody>
-          <a:bodyPr/>
-          <a:lstStyle/>
-          <a:p>
-            <a:endParaRPr lang="en-GB"/>
-          </a:p>
-        </p:txBody>
-      </p:sp>
-      <p:sp>
-        <p:nvSpPr>
-          <p:cNvPr id="17" name="Flow label 3"/>
-          <p:cNvSpPr txBox="1"/>
-          <p:nvPr/>
-        </p:nvSpPr>
-        <p:spPr>
-          <a:xfrm>
-            <a:off x="8458200" y="1920240"/>
-            <a:ext cx="2926080" cy="274320"/>
-          </a:xfrm>
-          <a:prstGeom prst="rect">
-            <a:avLst/>
-          </a:prstGeom>
-          <a:noFill/>
-          <a:ln/>
-        </p:spPr>
-        <p:txBody>
-          <a:bodyPr wrap="square" lIns="0" tIns="0" rIns="0" bIns="0" rtlCol="0" anchor="t"/>
-          <a:lstStyle/>
-          <a:p>
-            <a:pPr marL="0" indent="0" algn="l">
-              <a:spcAft>
-                <a:spcPts val="0"/>
-              </a:spcAft>
-              <a:buNone/>
-            </a:pPr>
-            <a:r>
-              <a:rPr lang="en-US" sz="1200" b="1" kern="0" spc="150" dirty="0">
-                <a:solidFill>
-                  <a:srgbClr val="8FC1FF"/>
-                </a:solidFill>
-                <a:latin typeface="Calibri" pitchFamily="34" charset="0"/>
-                <a:ea typeface="Calibri" pitchFamily="34" charset="-122"/>
-                <a:cs typeface="Calibri" pitchFamily="34" charset="-120"/>
-              </a:rPr>
-              <a:t>3   THE DEVELOPER SEES</a:t>
-            </a:r>
-          </a:p>
-        </p:txBody>
-      </p:sp>
-      <p:sp>
-        <p:nvSpPr>
-          <p:cNvPr id="18" name="Flow text 1"/>
-          <p:cNvSpPr txBox="1"/>
-          <p:nvPr/>
-        </p:nvSpPr>
-        <p:spPr>
-          <a:xfrm>
-            <a:off x="777240" y="2377440"/>
-            <a:ext cx="2926080" cy="1371600"/>
-          </a:xfrm>
-          <a:prstGeom prst="rect">
-            <a:avLst/>
-          </a:prstGeom>
-          <a:noFill/>
-          <a:ln/>
-        </p:spPr>
-        <p:txBody>
-          <a:bodyPr wrap="square" lIns="0" tIns="0" rIns="0" bIns="0" rtlCol="0" anchor="t"/>
-          <a:lstStyle/>
-          <a:p>
-            <a:pPr marL="0" indent="0" algn="l">
-              <a:spcAft>
-                <a:spcPts val="0"/>
-              </a:spcAft>
-              <a:buNone/>
-            </a:pPr>
-            <a:r>
-              <a:rPr lang="en-US" sz="1800" kern="0" dirty="0">
-                <a:solidFill>
-                  <a:srgbClr val="F2F5FA"/>
-                </a:solidFill>
-                <a:latin typeface="Calibri" pitchFamily="34" charset="0"/>
-                <a:ea typeface="Calibri" pitchFamily="34" charset="-122"/>
-                <a:cs typeface="Calibri" pitchFamily="34" charset="-120"/>
-              </a:rPr>
-              <a:t>An AI coding assistant drafts a call to one of the company’s own APIs.</a:t>
-            </a:r>
-          </a:p>
-        </p:txBody>
-      </p:sp>
-      <p:sp>
-        <p:nvSpPr>
-          <p:cNvPr id="19" name="Flow text 2"/>
-          <p:cNvSpPr txBox="1"/>
-          <p:nvPr/>
-        </p:nvSpPr>
-        <p:spPr>
-          <a:xfrm>
-            <a:off x="4617720" y="2377440"/>
-            <a:ext cx="2926080" cy="1371600"/>
-          </a:xfrm>
-          <a:prstGeom prst="rect">
-            <a:avLst/>
-          </a:prstGeom>
-          <a:noFill/>
-          <a:ln/>
-        </p:spPr>
-        <p:txBody>
-          <a:bodyPr wrap="square" lIns="0" tIns="0" rIns="0" bIns="0" rtlCol="0" anchor="t"/>
-          <a:lstStyle/>
-          <a:p>
-            <a:pPr marL="0" indent="0" algn="l">
-              <a:spcAft>
-                <a:spcPts val="0"/>
-              </a:spcAft>
-              <a:buNone/>
-            </a:pPr>
-            <a:r>
-              <a:rPr lang="en-US" sz="1800" kern="0" dirty="0">
-                <a:solidFill>
-                  <a:srgbClr val="F2F5FA"/>
-                </a:solidFill>
-                <a:latin typeface="Calibri" pitchFamily="34" charset="0"/>
-                <a:ea typeface="Calibri" pitchFamily="34" charset="-122"/>
-                <a:cs typeface="Calibri" pitchFamily="34" charset="-120"/>
-              </a:rPr>
-              <a:t>Every claim in the code is checked against that API’s specification, frozen and versioned.</a:t>
-            </a:r>
-          </a:p>
-        </p:txBody>
-      </p:sp>
-      <p:sp>
-        <p:nvSpPr>
-          <p:cNvPr id="20" name="Arrow 1"/>
-          <p:cNvSpPr/>
-          <p:nvPr/>
-        </p:nvSpPr>
-        <p:spPr>
-          <a:xfrm>
-            <a:off x="4023360" y="2606040"/>
-            <a:ext cx="274320" cy="365760"/>
-          </a:xfrm>
-          <a:prstGeom prst="rightArrow">
-            <a:avLst/>
-          </a:prstGeom>
-          <a:solidFill>
-            <a:srgbClr val="8FC1FF"/>
-          </a:solidFill>
-          <a:ln>
-            <a:noFill/>
-          </a:ln>
-        </p:spPr>
-        <p:txBody>
-          <a:bodyPr lIns="0" tIns="0" rIns="0" bIns="0" anchor="ctr"/>
-          <a:lstStyle/>
-          <a:p>
-            <a:endParaRPr lang="en-GB"/>
-          </a:p>
-        </p:txBody>
-      </p:sp>
-      <p:sp>
-        <p:nvSpPr>
-          <p:cNvPr id="21" name="Arrow 2"/>
-          <p:cNvSpPr/>
-          <p:nvPr/>
-        </p:nvSpPr>
-        <p:spPr>
-          <a:xfrm>
-            <a:off x="7863840" y="2606040"/>
-            <a:ext cx="274320" cy="365760"/>
-          </a:xfrm>
-          <a:prstGeom prst="rightArrow">
-            <a:avLst/>
-          </a:prstGeom>
-          <a:solidFill>
-            <a:srgbClr val="8FC1FF"/>
-          </a:solidFill>
-          <a:ln>
-            <a:noFill/>
-          </a:ln>
-        </p:spPr>
-        <p:txBody>
-          <a:bodyPr lIns="0" tIns="0" rIns="0" bIns="0" anchor="ctr"/>
-          <a:lstStyle/>
-          <a:p>
-            <a:endParaRPr lang="en-GB"/>
-          </a:p>
-        </p:txBody>
-      </p:sp>
-      <p:pic>
-        <p:nvPicPr>
-          <p:cNvPr id="22" name="Verified icon" descr="icon"/>
-          <p:cNvPicPr>
-            <a:picLocks noChangeAspect="1"/>
-          </p:cNvPicPr>
-          <p:nvPr/>
-        </p:nvPicPr>
-        <p:blipFill>
-          <a:blip r:embed="rId4"/>
-          <a:stretch>
-            <a:fillRect/>
-          </a:stretch>
-        </p:blipFill>
-        <p:spPr>
-          <a:xfrm>
-            <a:off x="8458200" y="2331720"/>
-            <a:ext cx="320040" cy="320040"/>
-          </a:xfrm>
-          <a:prstGeom prst="rect">
-            <a:avLst/>
-          </a:prstGeom>
-        </p:spPr>
-      </p:pic>
-      <p:sp>
-        <p:nvSpPr>
-          <p:cNvPr id="23" name="Outcome 1"/>
-          <p:cNvSpPr txBox="1"/>
-          <p:nvPr/>
-        </p:nvSpPr>
-        <p:spPr>
-          <a:xfrm>
-            <a:off x="8915400" y="2304288"/>
-            <a:ext cx="2468880" cy="374904"/>
-          </a:xfrm>
-          <a:prstGeom prst="rect">
-            <a:avLst/>
-          </a:prstGeom>
-          <a:noFill/>
-          <a:ln/>
-        </p:spPr>
-        <p:txBody>
-          <a:bodyPr wrap="square" lIns="0" tIns="0" rIns="0" bIns="0" rtlCol="0" anchor="ctr"/>
-          <a:lstStyle/>
-          <a:p>
-            <a:pPr marL="0" indent="0" algn="l">
-              <a:spcAft>
-                <a:spcPts val="0"/>
-              </a:spcAft>
-              <a:buNone/>
-            </a:pPr>
-            <a:r>
-              <a:rPr lang="en-US" sz="1600" b="1" kern="0" dirty="0">
-                <a:solidFill>
-                  <a:srgbClr val="F2F5FA"/>
-                </a:solidFill>
-                <a:latin typeface="Calibri" pitchFamily="34" charset="0"/>
-                <a:ea typeface="Calibri" pitchFamily="34" charset="-122"/>
-                <a:cs typeface="Calibri" pitchFamily="34" charset="-120"/>
-              </a:rPr>
-              <a:t>Verified: </a:t>
-            </a:r>
-            <a:r>
-              <a:rPr lang="en-US" sz="1600" kern="0" dirty="0">
-                <a:solidFill>
-                  <a:srgbClr val="F2F5FA"/>
-                </a:solidFill>
-                <a:latin typeface="Calibri" pitchFamily="34" charset="0"/>
-                <a:ea typeface="Calibri" pitchFamily="34" charset="-122"/>
-                <a:cs typeface="Calibri" pitchFamily="34" charset="-120"/>
-              </a:rPr>
-              <a:t>delivered</a:t>
-            </a:r>
-          </a:p>
-        </p:txBody>
-      </p:sp>
-      <p:sp>
-        <p:nvSpPr>
-          <p:cNvPr id="24" name="Flagged icon"/>
-          <p:cNvSpPr/>
-          <p:nvPr/>
-        </p:nvSpPr>
-        <p:spPr>
-          <a:xfrm>
-            <a:off x="8458200" y="2811780"/>
-            <a:ext cx="320040" cy="320040"/>
-          </a:xfrm>
-          <a:prstGeom prst="ellipse">
-            <a:avLst/>
-          </a:prstGeom>
-          <a:solidFill>
-            <a:srgbClr val="F7E23B"/>
-          </a:solidFill>
-          <a:ln>
-            <a:noFill/>
-          </a:ln>
-        </p:spPr>
-        <p:txBody>
-          <a:bodyPr lIns="0" tIns="0" rIns="0" bIns="0" anchor="ctr"/>
-          <a:lstStyle/>
-          <a:p>
-            <a:pPr algn="ctr"/>
-            <a:r>
-              <a:rPr lang="en-US" sz="1400" b="1" kern="0" dirty="0">
-                <a:solidFill>
-                  <a:srgbClr val="0B1B33"/>
-                </a:solidFill>
-                <a:latin typeface="Calibri" pitchFamily="34" charset="0"/>
-                <a:ea typeface="Calibri" pitchFamily="34" charset="-122"/>
-                <a:cs typeface="Calibri" pitchFamily="34" charset="-120"/>
-              </a:rPr>
-              <a:t>!</a:t>
-            </a:r>
-          </a:p>
-        </p:txBody>
-      </p:sp>
-      <p:sp>
-        <p:nvSpPr>
-          <p:cNvPr id="25" name="Outcome 2"/>
-          <p:cNvSpPr txBox="1"/>
-          <p:nvPr/>
-        </p:nvSpPr>
-        <p:spPr>
-          <a:xfrm>
-            <a:off x="8915400" y="2784348"/>
-            <a:ext cx="2468880" cy="374904"/>
-          </a:xfrm>
-          <a:prstGeom prst="rect">
-            <a:avLst/>
-          </a:prstGeom>
-          <a:noFill/>
-          <a:ln/>
-        </p:spPr>
-        <p:txBody>
-          <a:bodyPr wrap="square" lIns="0" tIns="0" rIns="0" bIns="0" rtlCol="0" anchor="ctr"/>
-          <a:lstStyle/>
-          <a:p>
-            <a:pPr marL="0" indent="0" algn="l">
-              <a:spcAft>
-                <a:spcPts val="0"/>
-              </a:spcAft>
-              <a:buNone/>
-            </a:pPr>
-            <a:r>
-              <a:rPr lang="en-US" sz="1600" b="1" kern="0" dirty="0">
-                <a:solidFill>
-                  <a:srgbClr val="F2F5FA"/>
-                </a:solidFill>
-                <a:latin typeface="Calibri" pitchFamily="34" charset="0"/>
-                <a:ea typeface="Calibri" pitchFamily="34" charset="-122"/>
-                <a:cs typeface="Calibri" pitchFamily="34" charset="-120"/>
-              </a:rPr>
-              <a:t>Flagged: </a:t>
-            </a:r>
-            <a:r>
-              <a:rPr lang="en-US" sz="1600" kern="0" dirty="0">
-                <a:solidFill>
-                  <a:srgbClr val="F2F5FA"/>
-                </a:solidFill>
-                <a:latin typeface="Calibri" pitchFamily="34" charset="0"/>
-                <a:ea typeface="Calibri" pitchFamily="34" charset="-122"/>
-                <a:cs typeface="Calibri" pitchFamily="34" charset="-120"/>
-              </a:rPr>
-              <a:t>with a warning</a:t>
-            </a:r>
-          </a:p>
-        </p:txBody>
-      </p:sp>
-      <p:pic>
-        <p:nvPicPr>
-          <p:cNvPr id="26" name="Withheld icon" descr="icon"/>
-          <p:cNvPicPr>
-            <a:picLocks noChangeAspect="1"/>
-          </p:cNvPicPr>
-          <p:nvPr/>
-        </p:nvPicPr>
-        <p:blipFill>
-          <a:blip r:embed="rId3"/>
-          <a:stretch>
-            <a:fillRect/>
-          </a:stretch>
-        </p:blipFill>
-        <p:spPr>
-          <a:xfrm>
-            <a:off x="8458200" y="3291840"/>
-            <a:ext cx="320040" cy="320040"/>
-          </a:xfrm>
-          <a:prstGeom prst="rect">
-            <a:avLst/>
-          </a:prstGeom>
-        </p:spPr>
-      </p:pic>
-      <p:sp>
-        <p:nvSpPr>
-          <p:cNvPr id="27" name="Outcome 3"/>
-          <p:cNvSpPr txBox="1"/>
-          <p:nvPr/>
-        </p:nvSpPr>
-        <p:spPr>
-          <a:xfrm>
-            <a:off x="8915400" y="3264408"/>
-            <a:ext cx="2468880" cy="374904"/>
-          </a:xfrm>
-          <a:prstGeom prst="rect">
-            <a:avLst/>
-          </a:prstGeom>
-          <a:noFill/>
-          <a:ln/>
-        </p:spPr>
-        <p:txBody>
-          <a:bodyPr wrap="square" lIns="0" tIns="0" rIns="0" bIns="0" rtlCol="0" anchor="ctr"/>
-          <a:lstStyle/>
-          <a:p>
-            <a:pPr marL="0" indent="0" algn="l">
-              <a:spcAft>
-                <a:spcPts val="0"/>
-              </a:spcAft>
-              <a:buNone/>
-            </a:pPr>
-            <a:r>
-              <a:rPr lang="en-US" sz="1600" b="1" kern="0" dirty="0">
-                <a:solidFill>
-                  <a:srgbClr val="F2F5FA"/>
-                </a:solidFill>
-                <a:latin typeface="Calibri" pitchFamily="34" charset="0"/>
-                <a:ea typeface="Calibri" pitchFamily="34" charset="-122"/>
-                <a:cs typeface="Calibri" pitchFamily="34" charset="-120"/>
-              </a:rPr>
-              <a:t>Withheld: </a:t>
-            </a:r>
-            <a:r>
-              <a:rPr lang="en-US" sz="1600" kern="0" dirty="0">
-                <a:solidFill>
-                  <a:srgbClr val="F2F5FA"/>
-                </a:solidFill>
-                <a:latin typeface="Calibri" pitchFamily="34" charset="0"/>
-                <a:ea typeface="Calibri" pitchFamily="34" charset="-122"/>
-                <a:cs typeface="Calibri" pitchFamily="34" charset="-120"/>
-              </a:rPr>
-              <a:t>held back</a:t>
-            </a:r>
-          </a:p>
-        </p:txBody>
-      </p:sp>
-      <p:sp>
-        <p:nvSpPr>
-          <p:cNvPr id="28" name="Fit card 1"/>
-          <p:cNvSpPr/>
-          <p:nvPr/>
-        </p:nvSpPr>
-        <p:spPr>
-          <a:xfrm>
-            <a:off x="548640" y="4069080"/>
-            <a:ext cx="3383280" cy="1325880"/>
-          </a:xfrm>
-          <a:prstGeom prst="roundRect">
-            <a:avLst>
-              <a:gd name="adj" fmla="val 4500"/>
-            </a:avLst>
-          </a:prstGeom>
-          <a:solidFill>
-            <a:srgbClr val="16294A"/>
-          </a:solidFill>
-          <a:ln w="12700">
-            <a:solidFill>
-              <a:srgbClr val="2B4470"/>
-            </a:solidFill>
-            <a:prstDash val="solid"/>
-          </a:ln>
-          <a:effectLst>
-            <a:outerShdw blurRad="152400" dist="38100" dir="5400000" algn="bl" rotWithShape="0">
-              <a:srgbClr val="000000">
-                <a:alpha val="35000"/>
-              </a:srgbClr>
-            </a:outerShdw>
-          </a:effectLst>
-        </p:spPr>
-        <p:txBody>
-          <a:bodyPr/>
-          <a:lstStyle/>
-          <a:p>
-            <a:endParaRPr lang="en-GB"/>
-          </a:p>
-        </p:txBody>
-      </p:sp>
-      <p:sp>
-        <p:nvSpPr>
-          <p:cNvPr id="29" name="Fit label 1"/>
-          <p:cNvSpPr txBox="1"/>
-          <p:nvPr/>
-        </p:nvSpPr>
-        <p:spPr>
-          <a:xfrm>
-            <a:off x="777240" y="4206240"/>
-            <a:ext cx="2926080" cy="274320"/>
-          </a:xfrm>
-          <a:prstGeom prst="rect">
-            <a:avLst/>
-          </a:prstGeom>
-          <a:noFill/>
-          <a:ln/>
-        </p:spPr>
-        <p:txBody>
-          <a:bodyPr wrap="square" lIns="0" tIns="0" rIns="0" bIns="0" rtlCol="0" anchor="t"/>
-          <a:lstStyle/>
-          <a:p>
-            <a:pPr marL="0" indent="0" algn="l">
-              <a:spcAft>
-                <a:spcPts val="0"/>
-              </a:spcAft>
-              <a:buNone/>
-            </a:pPr>
-            <a:r>
-              <a:rPr lang="en-US" sz="1200" b="1" kern="0" spc="150" dirty="0">
-                <a:solidFill>
-                  <a:srgbClr val="F7E23B"/>
-                </a:solidFill>
-                <a:latin typeface="Calibri" pitchFamily="34" charset="0"/>
-                <a:ea typeface="Calibri" pitchFamily="34" charset="-122"/>
-                <a:cs typeface="Calibri" pitchFamily="34" charset="-120"/>
-              </a:rPr>
-              <a:t>SPECIALISED</a:t>
-            </a:r>
-          </a:p>
-        </p:txBody>
-      </p:sp>
-      <p:sp>
-        <p:nvSpPr>
-          <p:cNvPr id="30" name="Fit text 1"/>
-          <p:cNvSpPr txBox="1"/>
-          <p:nvPr/>
-        </p:nvSpPr>
-        <p:spPr>
-          <a:xfrm>
-            <a:off x="777240" y="4526280"/>
-            <a:ext cx="2926080" cy="822960"/>
-          </a:xfrm>
-          <a:prstGeom prst="rect">
-            <a:avLst/>
-          </a:prstGeom>
-          <a:noFill/>
-          <a:ln/>
-        </p:spPr>
-        <p:txBody>
-          <a:bodyPr wrap="square" lIns="0" tIns="0" rIns="0" bIns="0" rtlCol="0" anchor="t"/>
-          <a:lstStyle/>
-          <a:p>
-            <a:pPr marL="0" indent="0" algn="l">
-              <a:spcAft>
-                <a:spcPts val="0"/>
-              </a:spcAft>
-              <a:buNone/>
-            </a:pPr>
-            <a:r>
-              <a:rPr lang="en-US" sz="1500" kern="0" dirty="0">
-                <a:solidFill>
-                  <a:srgbClr val="F2F5FA"/>
-                </a:solidFill>
-                <a:latin typeface="Calibri" pitchFamily="34" charset="0"/>
-                <a:ea typeface="Calibri" pitchFamily="34" charset="-122"/>
-                <a:cs typeface="Calibri" pitchFamily="34" charset="-120"/>
-              </a:rPr>
-              <a:t>One codebase and known contracts, so the checker is built around them, not around the whole internet.</a:t>
-            </a:r>
-          </a:p>
-        </p:txBody>
-      </p:sp>
-      <p:sp>
-        <p:nvSpPr>
-          <p:cNvPr id="31" name="Fit card 2"/>
-          <p:cNvSpPr/>
-          <p:nvPr/>
-        </p:nvSpPr>
-        <p:spPr>
-          <a:xfrm>
-            <a:off x="4389120" y="4069080"/>
-            <a:ext cx="3383280" cy="1325880"/>
-          </a:xfrm>
-          <a:prstGeom prst="roundRect">
-            <a:avLst>
-              <a:gd name="adj" fmla="val 4500"/>
-            </a:avLst>
-          </a:prstGeom>
-          <a:solidFill>
-            <a:srgbClr val="16294A"/>
-          </a:solidFill>
-          <a:ln w="12700">
-            <a:solidFill>
-              <a:srgbClr val="2B4470"/>
-            </a:solidFill>
-            <a:prstDash val="solid"/>
-          </a:ln>
-          <a:effectLst>
-            <a:outerShdw blurRad="152400" dist="38100" dir="5400000" algn="bl" rotWithShape="0">
-              <a:srgbClr val="000000">
-                <a:alpha val="35000"/>
-              </a:srgbClr>
-            </a:outerShdw>
-          </a:effectLst>
-        </p:spPr>
-        <p:txBody>
-          <a:bodyPr/>
-          <a:lstStyle/>
-          <a:p>
-            <a:endParaRPr lang="en-GB"/>
-          </a:p>
-        </p:txBody>
-      </p:sp>
-      <p:sp>
-        <p:nvSpPr>
-          <p:cNvPr id="32" name="Fit label 2"/>
-          <p:cNvSpPr txBox="1"/>
-          <p:nvPr/>
-        </p:nvSpPr>
-        <p:spPr>
-          <a:xfrm>
-            <a:off x="4617720" y="4206240"/>
-            <a:ext cx="2926080" cy="274320"/>
-          </a:xfrm>
-          <a:prstGeom prst="rect">
-            <a:avLst/>
-          </a:prstGeom>
-          <a:noFill/>
-          <a:ln/>
-        </p:spPr>
-        <p:txBody>
-          <a:bodyPr wrap="square" lIns="0" tIns="0" rIns="0" bIns="0" rtlCol="0" anchor="t"/>
-          <a:lstStyle/>
-          <a:p>
-            <a:pPr marL="0" indent="0" algn="l">
-              <a:spcAft>
-                <a:spcPts val="0"/>
-              </a:spcAft>
-              <a:buNone/>
-            </a:pPr>
-            <a:r>
-              <a:rPr lang="en-US" sz="1200" b="1" kern="0" spc="150" dirty="0">
-                <a:solidFill>
-                  <a:srgbClr val="F7E23B"/>
-                </a:solidFill>
-                <a:latin typeface="Calibri" pitchFamily="34" charset="0"/>
-                <a:ea typeface="Calibri" pitchFamily="34" charset="-122"/>
-                <a:cs typeface="Calibri" pitchFamily="34" charset="-120"/>
-              </a:rPr>
-              <a:t>STAYS CURRENT</a:t>
-            </a:r>
-          </a:p>
-        </p:txBody>
-      </p:sp>
-      <p:sp>
-        <p:nvSpPr>
-          <p:cNvPr id="33" name="Fit text 2"/>
-          <p:cNvSpPr txBox="1"/>
-          <p:nvPr/>
-        </p:nvSpPr>
-        <p:spPr>
-          <a:xfrm>
-            <a:off x="4617720" y="4526280"/>
-            <a:ext cx="2926080" cy="822960"/>
-          </a:xfrm>
-          <a:prstGeom prst="rect">
-            <a:avLst/>
-          </a:prstGeom>
-          <a:noFill/>
-          <a:ln/>
-        </p:spPr>
-        <p:txBody>
-          <a:bodyPr wrap="square" lIns="0" tIns="0" rIns="0" bIns="0" rtlCol="0" anchor="t"/>
-          <a:lstStyle/>
-          <a:p>
-            <a:pPr marL="0" indent="0" algn="l">
-              <a:spcAft>
-                <a:spcPts val="0"/>
-              </a:spcAft>
-              <a:buNone/>
-            </a:pPr>
-            <a:r>
-              <a:rPr lang="en-US" sz="1500" kern="0" dirty="0">
-                <a:solidFill>
-                  <a:srgbClr val="F2F5FA"/>
-                </a:solidFill>
-                <a:latin typeface="Calibri" pitchFamily="34" charset="0"/>
-                <a:ea typeface="Calibri" pitchFamily="34" charset="-122"/>
-                <a:cs typeface="Calibri" pitchFamily="34" charset="-120"/>
-              </a:rPr>
-              <a:t>Contracts change; a model’s training does not. Update the checker’s evidence, not the model.</a:t>
-            </a:r>
-          </a:p>
-        </p:txBody>
-      </p:sp>
-      <p:sp>
-        <p:nvSpPr>
-          <p:cNvPr id="34" name="Fit card 3"/>
-          <p:cNvSpPr/>
-          <p:nvPr/>
-        </p:nvSpPr>
-        <p:spPr>
-          <a:xfrm>
-            <a:off x="8229600" y="4069080"/>
-            <a:ext cx="3383280" cy="1325880"/>
-          </a:xfrm>
-          <a:prstGeom prst="roundRect">
-            <a:avLst>
-              <a:gd name="adj" fmla="val 4500"/>
-            </a:avLst>
-          </a:prstGeom>
-          <a:solidFill>
-            <a:srgbClr val="16294A"/>
-          </a:solidFill>
-          <a:ln w="12700">
-            <a:solidFill>
-              <a:srgbClr val="2B4470"/>
-            </a:solidFill>
-            <a:prstDash val="solid"/>
-          </a:ln>
-          <a:effectLst>
-            <a:outerShdw blurRad="152400" dist="38100" dir="5400000" algn="bl" rotWithShape="0">
-              <a:srgbClr val="000000">
-                <a:alpha val="35000"/>
-              </a:srgbClr>
-            </a:outerShdw>
-          </a:effectLst>
-        </p:spPr>
-        <p:txBody>
-          <a:bodyPr/>
-          <a:lstStyle/>
-          <a:p>
-            <a:endParaRPr lang="en-GB"/>
-          </a:p>
-        </p:txBody>
-      </p:sp>
-      <p:sp>
-        <p:nvSpPr>
-          <p:cNvPr id="35" name="Fit label 3"/>
-          <p:cNvSpPr txBox="1"/>
-          <p:nvPr/>
-        </p:nvSpPr>
-        <p:spPr>
-          <a:xfrm>
-            <a:off x="8458200" y="4206240"/>
-            <a:ext cx="2926080" cy="274320"/>
-          </a:xfrm>
-          <a:prstGeom prst="rect">
-            <a:avLst/>
-          </a:prstGeom>
-          <a:noFill/>
-          <a:ln/>
-        </p:spPr>
-        <p:txBody>
-          <a:bodyPr wrap="square" lIns="0" tIns="0" rIns="0" bIns="0" rtlCol="0" anchor="t"/>
-          <a:lstStyle/>
-          <a:p>
-            <a:pPr marL="0" indent="0" algn="l">
-              <a:spcAft>
-                <a:spcPts val="0"/>
-              </a:spcAft>
-              <a:buNone/>
-            </a:pPr>
-            <a:r>
-              <a:rPr lang="en-US" sz="1200" b="1" kern="0" spc="150" dirty="0">
-                <a:solidFill>
-                  <a:srgbClr val="F7E23B"/>
-                </a:solidFill>
-                <a:latin typeface="Calibri" pitchFamily="34" charset="0"/>
-                <a:ea typeface="Calibri" pitchFamily="34" charset="-122"/>
-                <a:cs typeface="Calibri" pitchFamily="34" charset="-120"/>
-              </a:rPr>
-              <a:t>CHEAP TO RUN</a:t>
-            </a:r>
-          </a:p>
-        </p:txBody>
-      </p:sp>
-      <p:sp>
-        <p:nvSpPr>
-          <p:cNvPr id="36" name="Fit text 3"/>
-          <p:cNvSpPr txBox="1"/>
-          <p:nvPr/>
-        </p:nvSpPr>
-        <p:spPr>
-          <a:xfrm>
-            <a:off x="8458200" y="4526280"/>
-            <a:ext cx="2926080" cy="822960"/>
-          </a:xfrm>
-          <a:prstGeom prst="rect">
-            <a:avLst/>
-          </a:prstGeom>
-          <a:noFill/>
-          <a:ln/>
-        </p:spPr>
-        <p:txBody>
-          <a:bodyPr wrap="square" lIns="0" tIns="0" rIns="0" bIns="0" rtlCol="0" anchor="t"/>
-          <a:lstStyle/>
-          <a:p>
-            <a:pPr marL="0" indent="0" algn="l">
-              <a:spcAft>
-                <a:spcPts val="0"/>
-              </a:spcAft>
-              <a:buNone/>
-            </a:pPr>
-            <a:r>
-              <a:rPr lang="en-US" sz="1500" kern="0" dirty="0">
-                <a:solidFill>
-                  <a:srgbClr val="F2F5FA"/>
-                </a:solidFill>
-                <a:latin typeface="Calibri" pitchFamily="34" charset="0"/>
-                <a:ea typeface="Calibri" pitchFamily="34" charset="-122"/>
-                <a:cs typeface="Calibri" pitchFamily="34" charset="-120"/>
-              </a:rPr>
-              <a:t>About one cent of local electricity per prompt in our tests. The real price is time: about six times longer.</a:t>
-            </a:r>
-          </a:p>
-        </p:txBody>
-      </p:sp>
-      <p:sp>
-        <p:nvSpPr>
-          <p:cNvPr id="37" name="Caveat"/>
-          <p:cNvSpPr txBox="1"/>
-          <p:nvPr/>
-        </p:nvSpPr>
-        <p:spPr>
-          <a:xfrm>
-            <a:off x="548640" y="5532120"/>
-            <a:ext cx="11064240" cy="320040"/>
-          </a:xfrm>
-          <a:prstGeom prst="rect">
-            <a:avLst/>
-          </a:prstGeom>
-          <a:noFill/>
-          <a:ln/>
-        </p:spPr>
-        <p:txBody>
-          <a:bodyPr wrap="square" lIns="0" tIns="0" rIns="0" bIns="0" rtlCol="0" anchor="t"/>
-          <a:lstStyle/>
-          <a:p>
-            <a:pPr marL="0" indent="0" algn="l">
-              <a:spcAft>
-                <a:spcPts val="0"/>
-              </a:spcAft>
-              <a:buNone/>
-            </a:pPr>
-            <a:r>
-              <a:rPr lang="en-US" sz="1500" i="1" kern="0" dirty="0">
-                <a:solidFill>
-                  <a:srgbClr val="9FB2CC"/>
-                </a:solidFill>
-                <a:latin typeface="Calibri" pitchFamily="34" charset="0"/>
-                <a:ea typeface="Calibri" pitchFamily="34" charset="-122"/>
-                <a:cs typeface="Calibri" pitchFamily="34" charset="-120"/>
-              </a:rPr>
-              <a:t>A sketch of one application, not something we tested: our evidence covers one model and six public APIs.</a:t>
-            </a:r>
-          </a:p>
-        </p:txBody>
-      </p:sp>
-      <p:sp>
-        <p:nvSpPr>
-          <p:cNvPr id="25" name="Slide Number Placeholder 0"/>
-          <p:cNvSpPr>
-            <a:spLocks noGrp="1"/>
-          </p:cNvSpPr>
-          <p:nvPr>
-            <p:ph type="sldNum" sz="quarter" idx="4294967295"/>
-          </p:nvPr>
-        </p:nvSpPr>
-        <p:spPr>
-          <a:xfrm>
-            <a:off x="11155680" y="6400800"/>
-            <a:ext cx="548640" cy="274320"/>
-          </a:xfrm>
-          <a:prstGeom prst="rect">
-            <a:avLst/>
-          </a:prstGeom>
-          <a:extLst>
-            <a:ext uri="{C572A759-6A51-4108-AA02-DFA0A04FC94B}">
-              <ma14:wrappingTextBoxFlag xmlns="" xmlns:ma14="http://schemas.microsoft.com/office/mac/drawingml/2011/main" val="0"/>
-            </a:ext>
-          </a:extLst>
-        </p:spPr>
-        <p:txBody>
-          <a:bodyPr/>
-          <a:lstStyle>
-            <a:lvl1pPr>
-              <a:defRPr sz="1000">
-                <a:solidFill>
-                  <a:srgbClr val="9FB2CC"/>
-                </a:solidFill>
-                <a:latin typeface="Calibri"/>
-                <a:ea typeface="Calibri"/>
-                <a:cs typeface="Calibri"/>
-              </a:defRPr>
-            </a:lvl1pPr>
-          </a:lstStyle>
-          <a:p>
-            <a:pPr algn="l"/>
-            <a:fld id="{F7021451-1387-4CA6-816F-3879F97B5CBC}" type="slidenum">
-              <a:rPr lang="en-US" b="0"/>
-              <a:t>24</a:t>
             </a:fld>
             <a:endParaRPr lang="en-US"/>
           </a:p>
@@ -29606,6 +30454,594 @@
             <a:fld id="{F7021451-1387-4CA6-816F-3879F97B5CBC}" type="slidenum">
               <a:rPr lang="en-US" b="0"/>
               <a:t>3</a:t>
+            </a:fld>
+            <a:endParaRPr lang="en-US"/>
+          </a:p>
+        </p:txBody>
+      </p:sp>
+    </p:spTree>
+  </p:cSld>
+  <p:clrMapOvr>
+    <a:masterClrMapping/>
+  </p:clrMapOvr>
+</p:sld>
+</file>
+
+<file path=ppt/slides/slide30.xml><?xml version="1.0" encoding="utf-8"?>
+<p:sld xmlns:a="http://schemas.openxmlformats.org/drawingml/2006/main" xmlns:r="http://schemas.openxmlformats.org/officeDocument/2006/relationships" xmlns:p="http://schemas.openxmlformats.org/presentationml/2006/main">
+  <p:cSld name="Slide 27">
+    <p:spTree>
+      <p:nvGrpSpPr>
+        <p:cNvPr id="1" name=""/>
+        <p:cNvGrpSpPr/>
+        <p:nvPr/>
+      </p:nvGrpSpPr>
+      <p:grpSpPr>
+        <a:xfrm>
+          <a:off x="0" y="0"/>
+          <a:ext cx="0" cy="0"/>
+          <a:chOff x="0" y="0"/>
+          <a:chExt cx="0" cy="0"/>
+        </a:xfrm>
+      </p:grpSpPr>
+      <p:sp>
+        <p:nvSpPr>
+          <p:cNvPr id="2" name="Text 0"/>
+          <p:cNvSpPr>
+            <a:spLocks noGrp="1"/>
+          </p:cNvSpPr>
+          <p:nvPr>
+            <p:ph type="title" idx="100" hasCustomPrompt="1"/>
+          </p:nvPr>
+        </p:nvSpPr>
+        <p:spPr>
+          <a:xfrm>
+            <a:off x="548640" y="365760"/>
+            <a:ext cx="11064240" cy="868680"/>
+          </a:xfrm>
+          <a:prstGeom prst="rect">
+            <a:avLst/>
+          </a:prstGeom>
+          <a:noFill/>
+          <a:ln/>
+        </p:spPr>
+        <p:txBody>
+          <a:bodyPr wrap="square" lIns="0" tIns="0" rIns="0" bIns="0" rtlCol="0" anchor="ctr"/>
+          <a:lstStyle/>
+          <a:p>
+            <a:pPr marL="0" indent="0" algn="l">
+              <a:buNone/>
+            </a:pPr>
+            <a:r>
+              <a:rPr lang="en-US" sz="3400" b="1" dirty="0">
+                <a:solidFill>
+                  <a:srgbClr val="F2F5FA"/>
+                </a:solidFill>
+                <a:latin typeface="Cambria" pitchFamily="34" charset="0"/>
+                <a:ea typeface="Cambria" pitchFamily="34" charset="-122"/>
+                <a:cs typeface="Cambria" pitchFamily="34" charset="-120"/>
+              </a:rPr>
+              <a:t>Appendix D: Sources and reproducibility</a:t>
+            </a:r>
+            <a:endParaRPr lang="en-US" sz="3400" dirty="0"/>
+          </a:p>
+        </p:txBody>
+      </p:sp>
+      <p:sp>
+        <p:nvSpPr>
+          <p:cNvPr id="3" name="Card"/>
+          <p:cNvSpPr/>
+          <p:nvPr/>
+        </p:nvSpPr>
+        <p:spPr>
+          <a:xfrm>
+            <a:off x="548640" y="1463040"/>
+            <a:ext cx="5440680" cy="2286000"/>
+          </a:xfrm>
+          <a:prstGeom prst="roundRect">
+            <a:avLst>
+              <a:gd name="adj" fmla="val 4800"/>
+            </a:avLst>
+          </a:prstGeom>
+          <a:solidFill>
+            <a:srgbClr val="16294A"/>
+          </a:solidFill>
+          <a:ln w="12700">
+            <a:solidFill>
+              <a:srgbClr val="8FC1FF"/>
+            </a:solidFill>
+            <a:prstDash val="solid"/>
+          </a:ln>
+          <a:effectLst>
+            <a:outerShdw blurRad="152400" dist="38100" dir="5400000" algn="bl" rotWithShape="0">
+              <a:srgbClr val="000000">
+                <a:alpha val="35000"/>
+              </a:srgbClr>
+            </a:outerShdw>
+          </a:effectLst>
+        </p:spPr>
+        <p:txBody>
+          <a:bodyPr/>
+          <a:lstStyle/>
+          <a:p>
+            <a:endParaRPr lang="en-GB"/>
+          </a:p>
+        </p:txBody>
+      </p:sp>
+      <p:sp>
+        <p:nvSpPr>
+          <p:cNvPr id="4" name="Text 2"/>
+          <p:cNvSpPr txBox="1"/>
+          <p:nvPr/>
+        </p:nvSpPr>
+        <p:spPr>
+          <a:xfrm>
+            <a:off x="822960" y="1645920"/>
+            <a:ext cx="4846320" cy="365760"/>
+          </a:xfrm>
+          <a:prstGeom prst="rect">
+            <a:avLst/>
+          </a:prstGeom>
+          <a:noFill/>
+          <a:ln/>
+        </p:spPr>
+        <p:txBody>
+          <a:bodyPr wrap="square" lIns="0" tIns="0" rIns="0" bIns="0" rtlCol="0" anchor="t"/>
+          <a:lstStyle/>
+          <a:p>
+            <a:pPr marL="0" indent="0">
+              <a:buNone/>
+            </a:pPr>
+            <a:r>
+              <a:rPr lang="en-US" sz="1400" b="1" kern="0" spc="200" dirty="0">
+                <a:solidFill>
+                  <a:srgbClr val="8FC1FF"/>
+                </a:solidFill>
+                <a:latin typeface="Calibri" pitchFamily="34" charset="0"/>
+                <a:ea typeface="Calibri" pitchFamily="34" charset="-122"/>
+                <a:cs typeface="Calibri" pitchFamily="34" charset="-120"/>
+              </a:rPr>
+              <a:t>RESEARCH EVIDENCE</a:t>
+            </a:r>
+            <a:endParaRPr lang="en-US" sz="1400" dirty="0"/>
+          </a:p>
+        </p:txBody>
+      </p:sp>
+      <p:sp>
+        <p:nvSpPr>
+          <p:cNvPr id="5" name="Text 3"/>
+          <p:cNvSpPr txBox="1"/>
+          <p:nvPr/>
+        </p:nvSpPr>
+        <p:spPr>
+          <a:xfrm>
+            <a:off x="822960" y="2194560"/>
+            <a:ext cx="4846320" cy="1371600"/>
+          </a:xfrm>
+          <a:prstGeom prst="rect">
+            <a:avLst/>
+          </a:prstGeom>
+          <a:noFill/>
+          <a:ln/>
+        </p:spPr>
+        <p:txBody>
+          <a:bodyPr wrap="square" lIns="0" tIns="0" rIns="0" bIns="0" rtlCol="0" anchor="t"/>
+          <a:lstStyle/>
+          <a:p>
+            <a:pPr marL="0" indent="0">
+              <a:buNone/>
+            </a:pPr>
+            <a:r>
+              <a:rPr lang="en-US" sz="1700" dirty="0">
+                <a:solidFill>
+                  <a:srgbClr val="F2F5FA"/>
+                </a:solidFill>
+                <a:latin typeface="Calibri" pitchFamily="34" charset="0"/>
+                <a:ea typeface="Calibri" pitchFamily="34" charset="-122"/>
+                <a:cs typeface="Calibri" pitchFamily="34" charset="-120"/>
+              </a:rPr>
+              <a:t>COMP301 The Skeptics Final Report. Tables 1, 3 to 5 and 7 to 12; Figures 1 to 6; Chapters 6 to 11.</a:t>
+            </a:r>
+            <a:endParaRPr lang="en-US" sz="1700" dirty="0"/>
+          </a:p>
+        </p:txBody>
+      </p:sp>
+      <p:sp>
+        <p:nvSpPr>
+          <p:cNvPr id="6" name="Card"/>
+          <p:cNvSpPr/>
+          <p:nvPr/>
+        </p:nvSpPr>
+        <p:spPr>
+          <a:xfrm>
+            <a:off x="6172200" y="1463040"/>
+            <a:ext cx="5440680" cy="2286000"/>
+          </a:xfrm>
+          <a:prstGeom prst="roundRect">
+            <a:avLst>
+              <a:gd name="adj" fmla="val 4800"/>
+            </a:avLst>
+          </a:prstGeom>
+          <a:solidFill>
+            <a:srgbClr val="16294A"/>
+          </a:solidFill>
+          <a:ln w="12700">
+            <a:solidFill>
+              <a:srgbClr val="3D95E8"/>
+            </a:solidFill>
+            <a:prstDash val="solid"/>
+          </a:ln>
+          <a:effectLst>
+            <a:outerShdw blurRad="152400" dist="38100" dir="5400000" algn="bl" rotWithShape="0">
+              <a:srgbClr val="000000">
+                <a:alpha val="35000"/>
+              </a:srgbClr>
+            </a:outerShdw>
+          </a:effectLst>
+        </p:spPr>
+        <p:txBody>
+          <a:bodyPr/>
+          <a:lstStyle/>
+          <a:p>
+            <a:endParaRPr lang="en-GB"/>
+          </a:p>
+        </p:txBody>
+      </p:sp>
+      <p:sp>
+        <p:nvSpPr>
+          <p:cNvPr id="7" name="Text 5"/>
+          <p:cNvSpPr txBox="1"/>
+          <p:nvPr/>
+        </p:nvSpPr>
+        <p:spPr>
+          <a:xfrm>
+            <a:off x="6446520" y="1645920"/>
+            <a:ext cx="4846320" cy="365760"/>
+          </a:xfrm>
+          <a:prstGeom prst="rect">
+            <a:avLst/>
+          </a:prstGeom>
+          <a:noFill/>
+          <a:ln/>
+        </p:spPr>
+        <p:txBody>
+          <a:bodyPr wrap="square" lIns="0" tIns="0" rIns="0" bIns="0" rtlCol="0" anchor="t"/>
+          <a:lstStyle/>
+          <a:p>
+            <a:pPr marL="0" indent="0">
+              <a:buNone/>
+            </a:pPr>
+            <a:r>
+              <a:rPr lang="en-US" sz="1400" b="1" kern="0" spc="200" dirty="0">
+                <a:solidFill>
+                  <a:srgbClr val="3D95E8"/>
+                </a:solidFill>
+                <a:latin typeface="Calibri" pitchFamily="34" charset="0"/>
+                <a:ea typeface="Calibri" pitchFamily="34" charset="-122"/>
+                <a:cs typeface="Calibri" pitchFamily="34" charset="-120"/>
+              </a:rPr>
+              <a:t>PRESENTER NARRATIVE</a:t>
+            </a:r>
+            <a:endParaRPr lang="en-US" sz="1400" dirty="0"/>
+          </a:p>
+        </p:txBody>
+      </p:sp>
+      <p:sp>
+        <p:nvSpPr>
+          <p:cNvPr id="8" name="Text 6"/>
+          <p:cNvSpPr txBox="1"/>
+          <p:nvPr/>
+        </p:nvSpPr>
+        <p:spPr>
+          <a:xfrm>
+            <a:off x="6446520" y="2194560"/>
+            <a:ext cx="4846320" cy="1371600"/>
+          </a:xfrm>
+          <a:prstGeom prst="rect">
+            <a:avLst/>
+          </a:prstGeom>
+          <a:noFill/>
+          <a:ln/>
+        </p:spPr>
+        <p:txBody>
+          <a:bodyPr wrap="square" lIns="0" tIns="0" rIns="0" bIns="0" rtlCol="0" anchor="t"/>
+          <a:lstStyle/>
+          <a:p>
+            <a:pPr marL="0" indent="0">
+              <a:buNone/>
+            </a:pPr>
+            <a:r>
+              <a:rPr lang="en-US" sz="1700" dirty="0">
+                <a:solidFill>
+                  <a:srgbClr val="F2F5FA"/>
+                </a:solidFill>
+                <a:latin typeface="Calibri" pitchFamily="34" charset="0"/>
+                <a:ea typeface="Calibri" pitchFamily="34" charset="-122"/>
+                <a:cs typeface="Calibri" pitchFamily="34" charset="-120"/>
+              </a:rPr>
+              <a:t>The Skeptics Final Presentation Script. Five presenter sections, about 15 to 16 minutes.</a:t>
+            </a:r>
+            <a:endParaRPr lang="en-US" sz="1700" dirty="0"/>
+          </a:p>
+        </p:txBody>
+      </p:sp>
+      <p:sp>
+        <p:nvSpPr>
+          <p:cNvPr id="9" name="Text 7"/>
+          <p:cNvSpPr txBox="1"/>
+          <p:nvPr/>
+        </p:nvSpPr>
+        <p:spPr>
+          <a:xfrm>
+            <a:off x="548640" y="4114800"/>
+            <a:ext cx="3566160" cy="640080"/>
+          </a:xfrm>
+          <a:prstGeom prst="rect">
+            <a:avLst/>
+          </a:prstGeom>
+          <a:noFill/>
+          <a:ln/>
+        </p:spPr>
+        <p:txBody>
+          <a:bodyPr wrap="square" lIns="0" tIns="0" rIns="0" bIns="0" rtlCol="0" anchor="t"/>
+          <a:lstStyle/>
+          <a:p>
+            <a:pPr marL="0" indent="0">
+              <a:buNone/>
+            </a:pPr>
+            <a:r>
+              <a:rPr lang="en-US" sz="3000" b="1" dirty="0">
+                <a:solidFill>
+                  <a:srgbClr val="F7E23B"/>
+                </a:solidFill>
+                <a:latin typeface="Cambria" pitchFamily="34" charset="0"/>
+                <a:ea typeface="Cambria" pitchFamily="34" charset="-122"/>
+                <a:cs typeface="Cambria" pitchFamily="34" charset="-120"/>
+              </a:rPr>
+              <a:t>21 Sep 2026</a:t>
+            </a:r>
+            <a:endParaRPr lang="en-US" sz="3000" dirty="0"/>
+          </a:p>
+        </p:txBody>
+      </p:sp>
+      <p:sp>
+        <p:nvSpPr>
+          <p:cNvPr id="10" name="Text 8"/>
+          <p:cNvSpPr txBox="1"/>
+          <p:nvPr/>
+        </p:nvSpPr>
+        <p:spPr>
+          <a:xfrm>
+            <a:off x="548640" y="4754880"/>
+            <a:ext cx="3566160" cy="457200"/>
+          </a:xfrm>
+          <a:prstGeom prst="rect">
+            <a:avLst/>
+          </a:prstGeom>
+          <a:noFill/>
+          <a:ln/>
+        </p:spPr>
+        <p:txBody>
+          <a:bodyPr wrap="square" lIns="0" tIns="0" rIns="0" bIns="0" rtlCol="0" anchor="t"/>
+          <a:lstStyle/>
+          <a:p>
+            <a:pPr marL="0" indent="0">
+              <a:buNone/>
+            </a:pPr>
+            <a:r>
+              <a:rPr lang="en-US" sz="1600" dirty="0">
+                <a:solidFill>
+                  <a:srgbClr val="9FB2CC"/>
+                </a:solidFill>
+                <a:latin typeface="Calibri" pitchFamily="34" charset="0"/>
+                <a:ea typeface="Calibri" pitchFamily="34" charset="-122"/>
+                <a:cs typeface="Calibri" pitchFamily="34" charset="-120"/>
+              </a:rPr>
+              <a:t>Specifications frozen</a:t>
+            </a:r>
+            <a:endParaRPr lang="en-US" sz="1600" dirty="0"/>
+          </a:p>
+        </p:txBody>
+      </p:sp>
+      <p:sp>
+        <p:nvSpPr>
+          <p:cNvPr id="11" name="Text 9"/>
+          <p:cNvSpPr txBox="1"/>
+          <p:nvPr/>
+        </p:nvSpPr>
+        <p:spPr>
+          <a:xfrm>
+            <a:off x="4297680" y="4114800"/>
+            <a:ext cx="3566160" cy="640080"/>
+          </a:xfrm>
+          <a:prstGeom prst="rect">
+            <a:avLst/>
+          </a:prstGeom>
+          <a:noFill/>
+          <a:ln/>
+        </p:spPr>
+        <p:txBody>
+          <a:bodyPr wrap="square" lIns="0" tIns="0" rIns="0" bIns="0" rtlCol="0" anchor="t"/>
+          <a:lstStyle/>
+          <a:p>
+            <a:pPr marL="0" indent="0">
+              <a:buNone/>
+            </a:pPr>
+            <a:r>
+              <a:rPr lang="en-US" sz="3000" b="1" dirty="0">
+                <a:solidFill>
+                  <a:srgbClr val="F7E23B"/>
+                </a:solidFill>
+                <a:latin typeface="Cambria" pitchFamily="34" charset="0"/>
+                <a:ea typeface="Cambria" pitchFamily="34" charset="-122"/>
+                <a:cs typeface="Cambria" pitchFamily="34" charset="-120"/>
+              </a:rPr>
+              <a:t>27 Sep 2026</a:t>
+            </a:r>
+            <a:endParaRPr lang="en-US" sz="3000" dirty="0"/>
+          </a:p>
+        </p:txBody>
+      </p:sp>
+      <p:sp>
+        <p:nvSpPr>
+          <p:cNvPr id="12" name="Text 10"/>
+          <p:cNvSpPr txBox="1"/>
+          <p:nvPr/>
+        </p:nvSpPr>
+        <p:spPr>
+          <a:xfrm>
+            <a:off x="4297680" y="4754880"/>
+            <a:ext cx="3566160" cy="457200"/>
+          </a:xfrm>
+          <a:prstGeom prst="rect">
+            <a:avLst/>
+          </a:prstGeom>
+          <a:noFill/>
+          <a:ln/>
+        </p:spPr>
+        <p:txBody>
+          <a:bodyPr wrap="square" lIns="0" tIns="0" rIns="0" bIns="0" rtlCol="0" anchor="t"/>
+          <a:lstStyle/>
+          <a:p>
+            <a:pPr marL="0" indent="0">
+              <a:buNone/>
+            </a:pPr>
+            <a:r>
+              <a:rPr lang="en-US" sz="1600" dirty="0">
+                <a:solidFill>
+                  <a:srgbClr val="9FB2CC"/>
+                </a:solidFill>
+                <a:latin typeface="Calibri" pitchFamily="34" charset="0"/>
+                <a:ea typeface="Calibri" pitchFamily="34" charset="-122"/>
+                <a:cs typeface="Calibri" pitchFamily="34" charset="-120"/>
+              </a:rPr>
+              <a:t>Evaluation plan fixed</a:t>
+            </a:r>
+            <a:endParaRPr lang="en-US" sz="1600" dirty="0"/>
+          </a:p>
+        </p:txBody>
+      </p:sp>
+      <p:sp>
+        <p:nvSpPr>
+          <p:cNvPr id="13" name="Text 11"/>
+          <p:cNvSpPr txBox="1"/>
+          <p:nvPr/>
+        </p:nvSpPr>
+        <p:spPr>
+          <a:xfrm>
+            <a:off x="8046720" y="4114800"/>
+            <a:ext cx="3566160" cy="640080"/>
+          </a:xfrm>
+          <a:prstGeom prst="rect">
+            <a:avLst/>
+          </a:prstGeom>
+          <a:noFill/>
+          <a:ln/>
+        </p:spPr>
+        <p:txBody>
+          <a:bodyPr wrap="square" lIns="0" tIns="0" rIns="0" bIns="0" rtlCol="0" anchor="t"/>
+          <a:lstStyle/>
+          <a:p>
+            <a:pPr marL="0" indent="0">
+              <a:buNone/>
+            </a:pPr>
+            <a:r>
+              <a:rPr lang="en-US" sz="3000" b="1" dirty="0">
+                <a:solidFill>
+                  <a:srgbClr val="F7E23B"/>
+                </a:solidFill>
+                <a:latin typeface="Cambria" pitchFamily="34" charset="0"/>
+                <a:ea typeface="Cambria" pitchFamily="34" charset="-122"/>
+                <a:cs typeface="Cambria" pitchFamily="34" charset="-120"/>
+              </a:rPr>
+              <a:t>30 Sep to 3 Oct 2026</a:t>
+            </a:r>
+            <a:endParaRPr lang="en-US" sz="3000" dirty="0"/>
+          </a:p>
+        </p:txBody>
+      </p:sp>
+      <p:sp>
+        <p:nvSpPr>
+          <p:cNvPr id="14" name="Text 12"/>
+          <p:cNvSpPr txBox="1"/>
+          <p:nvPr/>
+        </p:nvSpPr>
+        <p:spPr>
+          <a:xfrm>
+            <a:off x="8046720" y="4754880"/>
+            <a:ext cx="3566160" cy="457200"/>
+          </a:xfrm>
+          <a:prstGeom prst="rect">
+            <a:avLst/>
+          </a:prstGeom>
+          <a:noFill/>
+          <a:ln/>
+        </p:spPr>
+        <p:txBody>
+          <a:bodyPr wrap="square" lIns="0" tIns="0" rIns="0" bIns="0" rtlCol="0" anchor="t"/>
+          <a:lstStyle/>
+          <a:p>
+            <a:pPr marL="0" indent="0">
+              <a:buNone/>
+            </a:pPr>
+            <a:r>
+              <a:rPr lang="en-US" sz="1600" dirty="0">
+                <a:solidFill>
+                  <a:srgbClr val="9FB2CC"/>
+                </a:solidFill>
+                <a:latin typeface="Calibri" pitchFamily="34" charset="0"/>
+                <a:ea typeface="Calibri" pitchFamily="34" charset="-122"/>
+                <a:cs typeface="Calibri" pitchFamily="34" charset="-120"/>
+              </a:rPr>
+              <a:t>Main runs</a:t>
+            </a:r>
+            <a:endParaRPr lang="en-US" sz="1600" dirty="0"/>
+          </a:p>
+        </p:txBody>
+      </p:sp>
+      <p:sp>
+        <p:nvSpPr>
+          <p:cNvPr id="25" name="Slide Number Placeholder 0"/>
+          <p:cNvSpPr>
+            <a:spLocks noGrp="1"/>
+          </p:cNvSpPr>
+          <p:nvPr>
+            <p:ph type="sldNum" sz="quarter" idx="4294967295"/>
+          </p:nvPr>
+        </p:nvSpPr>
+        <p:spPr>
+          <a:xfrm>
+            <a:off x="11155680" y="6400800"/>
+            <a:ext cx="548640" cy="274320"/>
+          </a:xfrm>
+          <a:prstGeom prst="rect">
+            <a:avLst/>
+          </a:prstGeom>
+          <a:extLst>
+            <a:ext uri="{C572A759-6A51-4108-AA02-DFA0A04FC94B}">
+              <ma14:wrappingTextBoxFlag xmlns="" xmlns:ma14="http://schemas.microsoft.com/office/mac/drawingml/2011/main" val="0"/>
+            </a:ext>
+          </a:extLst>
+        </p:spPr>
+        <p:txBody>
+          <a:bodyPr/>
+          <a:lstStyle>
+            <a:lvl1pPr>
+              <a:defRPr sz="1000">
+                <a:solidFill>
+                  <a:srgbClr val="9FB2CC"/>
+                </a:solidFill>
+                <a:latin typeface="Calibri"/>
+                <a:ea typeface="Calibri"/>
+                <a:cs typeface="Calibri"/>
+              </a:defRPr>
+            </a:lvl1pPr>
+          </a:lstStyle>
+          <a:p>
+            <a:pPr algn="l"/>
+            <a:fld id="{F7021451-1387-4CA6-816F-3879F97B5CBC}" type="slidenum">
+              <a:rPr lang="en-US" b="0"/>
+              <a:t>30</a:t>
             </a:fld>
             <a:endParaRPr lang="en-US"/>
           </a:p>
